--- a/10-Knowledge-Products/KP1-GEA/videos/module_5/en/decks/KP1_M5_5.5_Deck_v0.2.pptx
+++ b/10-Knowledge-Products/KP1-GEA/videos/module_5/en/decks/KP1_M5_5.5_Deck_v0.2.pptx
@@ -14,14 +14,14 @@
     <p:handoutMasterId r:id="rId47"/>
   </p:handoutMasterIdLst>
   <p:sldIdLst>
-    <p:sldId id="2681" r:id="rId8"/>
-    <p:sldId id="2723" r:id="rId45"/>
-    <p:sldId id="2724" r:id="rId17"/>
-    <p:sldId id="2725" r:id="rId16"/>
-    <p:sldId id="2726" r:id="rId15"/>
     <p:sldId id="2727" r:id="rId14"/>
     <p:sldId id="2728" r:id="rId13"/>
     <p:sldId id="2729" r:id="rId12"/>
+    <p:sldId id="2730" r:id="rId11"/>
+    <p:sldId id="2731" r:id="rId10"/>
+    <p:sldId id="2732" r:id="rId54"/>
+    <p:sldId id="2733" r:id="rId55"/>
+    <p:sldId id="2734" r:id="rId56"/>
   </p:sldIdLst>
   <p:sldSz cx="12192000" cy="6858000"/>
   <p:notesSz cx="6858000" cy="9144000"/>
@@ -888,356 +888,6 @@
 </p:notesMaster>
 </file>
 
-<file path=ppt/notesSlides/notesSlide21.xml><?xml version="1.0" encoding="utf-8"?>
-<p:notes xmlns:a="http://schemas.openxmlformats.org/drawingml/2006/main" xmlns:p="http://schemas.openxmlformats.org/presentationml/2006/main" xmlns:r="http://schemas.openxmlformats.org/officeDocument/2006/relationships">
-  <p:cSld>
-    <p:spTree>
-      <p:nvGrpSpPr>
-        <p:cNvPr id="1" name=""/>
-        <p:cNvGrpSpPr/>
-        <p:nvPr/>
-      </p:nvGrpSpPr>
-      <p:grpSpPr>
-        <a:xfrm>
-          <a:off x="0" y="0"/>
-          <a:ext cx="0" cy="0"/>
-          <a:chOff x="0" y="0"/>
-          <a:chExt cx="0" cy="0"/>
-        </a:xfrm>
-      </p:grpSpPr>
-      <p:sp>
-        <p:nvSpPr>
-          <p:cNvPr id="2" name="Slide Image Placeholder 1"/>
-          <p:cNvSpPr>
-            <a:spLocks noGrp="1"/>
-          </p:cNvSpPr>
-          <p:nvPr>
-            <p:ph type="sldImg" idx="2"/>
-          </p:nvPr>
-        </p:nvSpPr>
-        <p:spPr/>
-      </p:sp>
-      <p:sp>
-        <p:nvSpPr>
-          <p:cNvPr id="3" name="Notes Placeholder 2"/>
-          <p:cNvSpPr>
-            <a:spLocks noGrp="1"/>
-          </p:cNvSpPr>
-          <p:nvPr>
-            <p:ph type="body" idx="3" sz="quarter"/>
-          </p:nvPr>
-        </p:nvSpPr>
-        <p:spPr/>
-        <p:txBody>
-          <a:bodyPr/>
-          <a:lstStyle/>
-          <a:p>
-            <a:r>
-              <a:t>Title card for standalone video 5.5. Content slides are identical to the corresponding section of the combined deck KP1_M5_Deck_v0.2.pptx; voice-over is in each slide’s notes.</a:t>
-            </a:r>
-          </a:p>
-        </p:txBody>
-      </p:sp>
-      <p:sp>
-        <p:nvSpPr>
-          <p:cNvPr id="4" name="Slide Number Placeholder 3"/>
-          <p:cNvSpPr>
-            <a:spLocks noGrp="1"/>
-          </p:cNvSpPr>
-          <p:nvPr>
-            <p:ph type="sldNum" idx="5" sz="quarter"/>
-          </p:nvPr>
-        </p:nvSpPr>
-        <p:spPr/>
-      </p:sp>
-    </p:spTree>
-  </p:cSld>
-  <p:clrMapOvr>
-    <a:masterClrMapping/>
-  </p:clrMapOvr>
-</p:notes>
-</file>
-
-<file path=ppt/notesSlides/notesSlide30.xml><?xml version="1.0" encoding="utf-8"?>
-<p:notes xmlns:a="http://schemas.openxmlformats.org/drawingml/2006/main" xmlns:p="http://schemas.openxmlformats.org/presentationml/2006/main" xmlns:r="http://schemas.openxmlformats.org/officeDocument/2006/relationships">
-  <p:cSld>
-    <p:spTree>
-      <p:nvGrpSpPr>
-        <p:cNvPr id="1" name=""/>
-        <p:cNvGrpSpPr/>
-        <p:nvPr/>
-      </p:nvGrpSpPr>
-      <p:grpSpPr>
-        <a:xfrm>
-          <a:off x="0" y="0"/>
-          <a:ext cx="0" cy="0"/>
-          <a:chOff x="0" y="0"/>
-          <a:chExt cx="0" cy="0"/>
-        </a:xfrm>
-      </p:grpSpPr>
-      <p:sp>
-        <p:nvSpPr>
-          <p:cNvPr id="2" name="Slide Image Placeholder 1"/>
-          <p:cNvSpPr>
-            <a:spLocks noGrp="1"/>
-          </p:cNvSpPr>
-          <p:nvPr>
-            <p:ph type="sldImg" idx="2"/>
-          </p:nvPr>
-        </p:nvSpPr>
-        <p:spPr/>
-      </p:sp>
-      <p:sp>
-        <p:nvSpPr>
-          <p:cNvPr id="3" name="Notes Placeholder 2"/>
-          <p:cNvSpPr>
-            <a:spLocks noGrp="1"/>
-          </p:cNvSpPr>
-          <p:nvPr>
-            <p:ph type="body" idx="3" sz="quarter"/>
-          </p:nvPr>
-        </p:nvSpPr>
-        <p:spPr/>
-        <p:txBody>
-          <a:bodyPr/>
-          <a:lstStyle/>
-          <a:p>
-            <a:r>
-              <a:t>VO, slide 1: One worry that stops strategists committing is capability: do we have the people, and can we afford to train them? You do not have to build the knowledge from scratch. The method, the framework and the training materials already exist as open knowledge products.</a:t>
-            </a:r>
-          </a:p>
-        </p:txBody>
-      </p:sp>
-      <p:sp>
-        <p:nvSpPr>
-          <p:cNvPr id="4" name="Slide Number Placeholder 3"/>
-          <p:cNvSpPr>
-            <a:spLocks noGrp="1"/>
-          </p:cNvSpPr>
-          <p:nvPr>
-            <p:ph type="sldNum" idx="5" sz="quarter"/>
-          </p:nvPr>
-        </p:nvSpPr>
-        <p:spPr/>
-      </p:sp>
-    </p:spTree>
-  </p:cSld>
-  <p:clrMapOvr>
-    <a:masterClrMapping/>
-  </p:clrMapOvr>
-</p:notes>
-</file>
-
-<file path=ppt/notesSlides/notesSlide31.xml><?xml version="1.0" encoding="utf-8"?>
-<p:notes xmlns:a="http://schemas.openxmlformats.org/drawingml/2006/main" xmlns:p="http://schemas.openxmlformats.org/presentationml/2006/main" xmlns:r="http://schemas.openxmlformats.org/officeDocument/2006/relationships">
-  <p:cSld>
-    <p:spTree>
-      <p:nvGrpSpPr>
-        <p:cNvPr id="1" name=""/>
-        <p:cNvGrpSpPr/>
-        <p:nvPr/>
-      </p:nvGrpSpPr>
-      <p:grpSpPr>
-        <a:xfrm>
-          <a:off x="0" y="0"/>
-          <a:ext cx="0" cy="0"/>
-          <a:chOff x="0" y="0"/>
-          <a:chExt cx="0" cy="0"/>
-        </a:xfrm>
-      </p:grpSpPr>
-      <p:sp>
-        <p:nvSpPr>
-          <p:cNvPr id="2" name="Slide Image Placeholder 1"/>
-          <p:cNvSpPr>
-            <a:spLocks noGrp="1"/>
-          </p:cNvSpPr>
-          <p:nvPr>
-            <p:ph type="sldImg" idx="2"/>
-          </p:nvPr>
-        </p:nvSpPr>
-        <p:spPr/>
-      </p:sp>
-      <p:sp>
-        <p:nvSpPr>
-          <p:cNvPr id="3" name="Notes Placeholder 2"/>
-          <p:cNvSpPr>
-            <a:spLocks noGrp="1"/>
-          </p:cNvSpPr>
-          <p:nvPr>
-            <p:ph type="body" idx="3" sz="quarter"/>
-          </p:nvPr>
-        </p:nvSpPr>
-        <p:spPr/>
-        <p:txBody>
-          <a:bodyPr/>
-          <a:lstStyle/>
-          <a:p>
-            <a:r>
-              <a:t>VO: The method is not locked in a consultant's head. The reference architecture is published. The building-block specifications are open. And the knowledge products — videos, written guides, worked examples, the very materials this is part of — are made to teach a practising architect the method step by step. Your team does not start from a blank page. They start from a documented method that other countries are already using, which means your training cost is a fraction of what building the knowledge yourself would be.</a:t>
-            </a:r>
-          </a:p>
-        </p:txBody>
-      </p:sp>
-      <p:sp>
-        <p:nvSpPr>
-          <p:cNvPr id="4" name="Slide Number Placeholder 3"/>
-          <p:cNvSpPr>
-            <a:spLocks noGrp="1"/>
-          </p:cNvSpPr>
-          <p:nvPr>
-            <p:ph type="sldNum" idx="5" sz="quarter"/>
-          </p:nvPr>
-        </p:nvSpPr>
-        <p:spPr/>
-      </p:sp>
-    </p:spTree>
-  </p:cSld>
-  <p:clrMapOvr>
-    <a:masterClrMapping/>
-  </p:clrMapOvr>
-</p:notes>
-</file>
-
-<file path=ppt/notesSlides/notesSlide32.xml><?xml version="1.0" encoding="utf-8"?>
-<p:notes xmlns:a="http://schemas.openxmlformats.org/drawingml/2006/main" xmlns:p="http://schemas.openxmlformats.org/presentationml/2006/main" xmlns:r="http://schemas.openxmlformats.org/officeDocument/2006/relationships">
-  <p:cSld>
-    <p:spTree>
-      <p:nvGrpSpPr>
-        <p:cNvPr id="1" name=""/>
-        <p:cNvGrpSpPr/>
-        <p:nvPr/>
-      </p:nvGrpSpPr>
-      <p:grpSpPr>
-        <a:xfrm>
-          <a:off x="0" y="0"/>
-          <a:ext cx="0" cy="0"/>
-          <a:chOff x="0" y="0"/>
-          <a:chExt cx="0" cy="0"/>
-        </a:xfrm>
-      </p:grpSpPr>
-      <p:sp>
-        <p:nvSpPr>
-          <p:cNvPr id="2" name="Slide Image Placeholder 1"/>
-          <p:cNvSpPr>
-            <a:spLocks noGrp="1"/>
-          </p:cNvSpPr>
-          <p:nvPr>
-            <p:ph type="sldImg" idx="2"/>
-          </p:nvPr>
-        </p:nvSpPr>
-        <p:spPr/>
-      </p:sp>
-      <p:sp>
-        <p:nvSpPr>
-          <p:cNvPr id="3" name="Notes Placeholder 2"/>
-          <p:cNvSpPr>
-            <a:spLocks noGrp="1"/>
-          </p:cNvSpPr>
-          <p:nvPr>
-            <p:ph type="body" idx="3" sz="quarter"/>
-          </p:nvPr>
-        </p:nvSpPr>
-        <p:spPr/>
-        <p:txBody>
-          <a:bodyPr/>
-          <a:lstStyle/>
-          <a:p>
-            <a:r>
-              <a:t>VO: Think of the capability as three layers you can draw on rather than build. The published framework tells your team what to do — the phases, the principles, the deliverables. The worked examples and the AI plays show them how to do it faster — turning a method into a draft in minutes. And the community — the countries, the partners, the certification and the shared knowledge base around the framework — tells them who to ask when they are stuck. You are not equipping your team alone. You are connecting them to a network that is already solving these problems.</a:t>
-            </a:r>
-          </a:p>
-        </p:txBody>
-      </p:sp>
-      <p:sp>
-        <p:nvSpPr>
-          <p:cNvPr id="4" name="Slide Number Placeholder 3"/>
-          <p:cNvSpPr>
-            <a:spLocks noGrp="1"/>
-          </p:cNvSpPr>
-          <p:nvPr>
-            <p:ph type="sldNum" idx="5" sz="quarter"/>
-          </p:nvPr>
-        </p:nvSpPr>
-        <p:spPr/>
-      </p:sp>
-    </p:spTree>
-  </p:cSld>
-  <p:clrMapOvr>
-    <a:masterClrMapping/>
-  </p:clrMapOvr>
-</p:notes>
-</file>
-
-<file path=ppt/notesSlides/notesSlide33.xml><?xml version="1.0" encoding="utf-8"?>
-<p:notes xmlns:a="http://schemas.openxmlformats.org/drawingml/2006/main" xmlns:p="http://schemas.openxmlformats.org/presentationml/2006/main" xmlns:r="http://schemas.openxmlformats.org/officeDocument/2006/relationships">
-  <p:cSld>
-    <p:spTree>
-      <p:nvGrpSpPr>
-        <p:cNvPr id="1" name=""/>
-        <p:cNvGrpSpPr/>
-        <p:nvPr/>
-      </p:nvGrpSpPr>
-      <p:grpSpPr>
-        <a:xfrm>
-          <a:off x="0" y="0"/>
-          <a:ext cx="0" cy="0"/>
-          <a:chOff x="0" y="0"/>
-          <a:chExt cx="0" cy="0"/>
-        </a:xfrm>
-      </p:grpSpPr>
-      <p:sp>
-        <p:nvSpPr>
-          <p:cNvPr id="2" name="Slide Image Placeholder 1"/>
-          <p:cNvSpPr>
-            <a:spLocks noGrp="1"/>
-          </p:cNvSpPr>
-          <p:nvPr>
-            <p:ph type="sldImg" idx="2"/>
-          </p:nvPr>
-        </p:nvSpPr>
-        <p:spPr/>
-      </p:sp>
-      <p:sp>
-        <p:nvSpPr>
-          <p:cNvPr id="3" name="Notes Placeholder 2"/>
-          <p:cNvSpPr>
-            <a:spLocks noGrp="1"/>
-          </p:cNvSpPr>
-          <p:nvPr>
-            <p:ph type="body" idx="3" sz="quarter"/>
-          </p:nvPr>
-        </p:nvSpPr>
-        <p:spPr/>
-        <p:txBody>
-          <a:bodyPr/>
-          <a:lstStyle/>
-          <a:p>
-            <a:r>
-              <a:t>VO: So what do you actually need to fund? Not the invention of a method — that exists. You need a small team given the time to learn it and apply it to your country, and access to the materials and the community. The expensive thing — the decades of accumulated knowledge about what works in public-sector architecture — you get for the cost of learning it, not the cost of discovering it. That is the difference between funding a team to apply a proven method and funding consultants to invent one. The first is affordable and builds lasting capability in your own people; the second is neither.</a:t>
-            </a:r>
-          </a:p>
-        </p:txBody>
-      </p:sp>
-      <p:sp>
-        <p:nvSpPr>
-          <p:cNvPr id="4" name="Slide Number Placeholder 3"/>
-          <p:cNvSpPr>
-            <a:spLocks noGrp="1"/>
-          </p:cNvSpPr>
-          <p:nvPr>
-            <p:ph type="sldNum" idx="5" sz="quarter"/>
-          </p:nvPr>
-        </p:nvSpPr>
-        <p:spPr/>
-      </p:sp>
-    </p:spTree>
-  </p:cSld>
-  <p:clrMapOvr>
-    <a:masterClrMapping/>
-  </p:clrMapOvr>
-</p:notes>
-</file>
-
 <file path=ppt/notesSlides/notesSlide34.xml><?xml version="1.0" encoding="utf-8"?>
 <p:notes xmlns:a="http://schemas.openxmlformats.org/drawingml/2006/main" xmlns:p="http://schemas.openxmlformats.org/presentationml/2006/main" xmlns:r="http://schemas.openxmlformats.org/officeDocument/2006/relationships">
   <p:cSld>
@@ -1283,13 +933,7 @@
           <a:lstStyle/>
           <a:p>
             <a:r>
-              <a:t>VO: And aim the capability at your own people, not at a consultancy you will depend on forever. The reason to use open knowledge products is not only that they are cheaper. It is that they let you build the capability inside your own institutions — architects who learn the method, apply it, and stay, instead of expertise that walks out the door when a contract ends. A strategist's quiet goal in all of this is a national capability that outlasts any single contract or consultant. Open knowledge products are how you build it in your own people.</a:t>
-            </a:r>
-          </a:p>
-          <a:p/>
-          <a:p>
-            <a:r>
-              <a:t>Production cue: the pivotal slide of this video. Hold it a beat longer.</a:t>
+              <a:t>Title card — the cold open. The hosts name the module, the video number, the title and the single message on this slide; no scripted narration. Hold until the opener begins; the opener is narrated on the next slide.</a:t>
             </a:r>
           </a:p>
         </p:txBody>
@@ -1359,13 +1003,7 @@
           <a:lstStyle/>
           <a:p>
             <a:r>
-              <a:t>PRACTICE BOX (on-screen only — never read it, never paraphrase it, never point at it). It replaces the narrated handoff: this video ends on the recap and the Sources slide.</a:t>
-            </a:r>
-          </a:p>
-          <a:p/>
-          <a:p>
-            <a:r>
-              <a:t>VO: So capability is not the barrier it appears to be. The knowledge is documented, open and taught. Use it to grow your own architects, and you build something that lasts longer than any contract.</a:t>
+              <a:t>VO: One worry that stops strategists committing is capability: do we have the people, and can we afford to train them? You do not have to build the knowledge from scratch. The method, the framework and the training materials already exist as open knowledge products.</a:t>
             </a:r>
           </a:p>
         </p:txBody>
@@ -1391,6 +1029,368 @@
 </file>
 
 <file path=ppt/notesSlides/notesSlide36.xml><?xml version="1.0" encoding="utf-8"?>
+<p:notes xmlns:a="http://schemas.openxmlformats.org/drawingml/2006/main" xmlns:p="http://schemas.openxmlformats.org/presentationml/2006/main" xmlns:r="http://schemas.openxmlformats.org/officeDocument/2006/relationships">
+  <p:cSld>
+    <p:spTree>
+      <p:nvGrpSpPr>
+        <p:cNvPr id="1" name=""/>
+        <p:cNvGrpSpPr/>
+        <p:nvPr/>
+      </p:nvGrpSpPr>
+      <p:grpSpPr>
+        <a:xfrm>
+          <a:off x="0" y="0"/>
+          <a:ext cx="0" cy="0"/>
+          <a:chOff x="0" y="0"/>
+          <a:chExt cx="0" cy="0"/>
+        </a:xfrm>
+      </p:grpSpPr>
+      <p:sp>
+        <p:nvSpPr>
+          <p:cNvPr id="2" name="Slide Image Placeholder 1"/>
+          <p:cNvSpPr>
+            <a:spLocks noGrp="1"/>
+          </p:cNvSpPr>
+          <p:nvPr>
+            <p:ph type="sldImg" idx="2"/>
+          </p:nvPr>
+        </p:nvSpPr>
+        <p:spPr/>
+      </p:sp>
+      <p:sp>
+        <p:nvSpPr>
+          <p:cNvPr id="3" name="Notes Placeholder 2"/>
+          <p:cNvSpPr>
+            <a:spLocks noGrp="1"/>
+          </p:cNvSpPr>
+          <p:nvPr>
+            <p:ph type="body" idx="3" sz="quarter"/>
+          </p:nvPr>
+        </p:nvSpPr>
+        <p:spPr/>
+        <p:txBody>
+          <a:bodyPr/>
+          <a:lstStyle/>
+          <a:p>
+            <a:r>
+              <a:t>VO: The method is not locked in a consultant's head. The reference architecture is published. The building-block specifications are open. And the knowledge products — videos, written guides, worked examples, the very materials this is part of — are made to teach a practising architect the method step by step. Your team does not start from a blank page. They start from a documented method that other countries are already using, which means your training cost is a fraction of what building the knowledge yourself would be.</a:t>
+            </a:r>
+          </a:p>
+        </p:txBody>
+      </p:sp>
+      <p:sp>
+        <p:nvSpPr>
+          <p:cNvPr id="4" name="Slide Number Placeholder 3"/>
+          <p:cNvSpPr>
+            <a:spLocks noGrp="1"/>
+          </p:cNvSpPr>
+          <p:nvPr>
+            <p:ph type="sldNum" idx="5" sz="quarter"/>
+          </p:nvPr>
+        </p:nvSpPr>
+        <p:spPr/>
+      </p:sp>
+    </p:spTree>
+  </p:cSld>
+  <p:clrMapOvr>
+    <a:masterClrMapping/>
+  </p:clrMapOvr>
+</p:notes>
+</file>
+
+<file path=ppt/notesSlides/notesSlide37.xml><?xml version="1.0" encoding="utf-8"?>
+<p:notes xmlns:a="http://schemas.openxmlformats.org/drawingml/2006/main" xmlns:p="http://schemas.openxmlformats.org/presentationml/2006/main" xmlns:r="http://schemas.openxmlformats.org/officeDocument/2006/relationships">
+  <p:cSld>
+    <p:spTree>
+      <p:nvGrpSpPr>
+        <p:cNvPr id="1" name=""/>
+        <p:cNvGrpSpPr/>
+        <p:nvPr/>
+      </p:nvGrpSpPr>
+      <p:grpSpPr>
+        <a:xfrm>
+          <a:off x="0" y="0"/>
+          <a:ext cx="0" cy="0"/>
+          <a:chOff x="0" y="0"/>
+          <a:chExt cx="0" cy="0"/>
+        </a:xfrm>
+      </p:grpSpPr>
+      <p:sp>
+        <p:nvSpPr>
+          <p:cNvPr id="2" name="Slide Image Placeholder 1"/>
+          <p:cNvSpPr>
+            <a:spLocks noGrp="1"/>
+          </p:cNvSpPr>
+          <p:nvPr>
+            <p:ph type="sldImg" idx="2"/>
+          </p:nvPr>
+        </p:nvSpPr>
+        <p:spPr/>
+      </p:sp>
+      <p:sp>
+        <p:nvSpPr>
+          <p:cNvPr id="3" name="Notes Placeholder 2"/>
+          <p:cNvSpPr>
+            <a:spLocks noGrp="1"/>
+          </p:cNvSpPr>
+          <p:nvPr>
+            <p:ph type="body" idx="3" sz="quarter"/>
+          </p:nvPr>
+        </p:nvSpPr>
+        <p:spPr/>
+        <p:txBody>
+          <a:bodyPr/>
+          <a:lstStyle/>
+          <a:p>
+            <a:r>
+              <a:t>VO: Think of the capability as three layers you can draw on rather than build. The published framework tells your team what to do — the phases, the principles, the deliverables. The worked examples and the AI plays show them how to do it faster — turning a method into a draft in minutes. And the community — the countries, the partners, the certification and the shared knowledge base around the framework — tells them who to ask when they are stuck. You are not equipping your team alone. You are connecting them to a network that is already solving these problems.</a:t>
+            </a:r>
+          </a:p>
+        </p:txBody>
+      </p:sp>
+      <p:sp>
+        <p:nvSpPr>
+          <p:cNvPr id="4" name="Slide Number Placeholder 3"/>
+          <p:cNvSpPr>
+            <a:spLocks noGrp="1"/>
+          </p:cNvSpPr>
+          <p:nvPr>
+            <p:ph type="sldNum" idx="5" sz="quarter"/>
+          </p:nvPr>
+        </p:nvSpPr>
+        <p:spPr/>
+      </p:sp>
+    </p:spTree>
+  </p:cSld>
+  <p:clrMapOvr>
+    <a:masterClrMapping/>
+  </p:clrMapOvr>
+</p:notes>
+</file>
+
+<file path=ppt/notesSlides/notesSlide38.xml><?xml version="1.0" encoding="utf-8"?>
+<p:notes xmlns:a="http://schemas.openxmlformats.org/drawingml/2006/main" xmlns:p="http://schemas.openxmlformats.org/presentationml/2006/main" xmlns:r="http://schemas.openxmlformats.org/officeDocument/2006/relationships">
+  <p:cSld>
+    <p:spTree>
+      <p:nvGrpSpPr>
+        <p:cNvPr id="1" name=""/>
+        <p:cNvGrpSpPr/>
+        <p:nvPr/>
+      </p:nvGrpSpPr>
+      <p:grpSpPr>
+        <a:xfrm>
+          <a:off x="0" y="0"/>
+          <a:ext cx="0" cy="0"/>
+          <a:chOff x="0" y="0"/>
+          <a:chExt cx="0" cy="0"/>
+        </a:xfrm>
+      </p:grpSpPr>
+      <p:sp>
+        <p:nvSpPr>
+          <p:cNvPr id="2" name="Slide Image Placeholder 1"/>
+          <p:cNvSpPr>
+            <a:spLocks noGrp="1"/>
+          </p:cNvSpPr>
+          <p:nvPr>
+            <p:ph type="sldImg" idx="2"/>
+          </p:nvPr>
+        </p:nvSpPr>
+        <p:spPr/>
+      </p:sp>
+      <p:sp>
+        <p:nvSpPr>
+          <p:cNvPr id="3" name="Notes Placeholder 2"/>
+          <p:cNvSpPr>
+            <a:spLocks noGrp="1"/>
+          </p:cNvSpPr>
+          <p:nvPr>
+            <p:ph type="body" idx="3" sz="quarter"/>
+          </p:nvPr>
+        </p:nvSpPr>
+        <p:spPr/>
+        <p:txBody>
+          <a:bodyPr/>
+          <a:lstStyle/>
+          <a:p>
+            <a:r>
+              <a:t>VO: So what do you actually need to fund? Not the invention of a method — that exists. You need a small team given the time to learn it and apply it to your country, and access to the materials and the community. The expensive thing — the decades of accumulated knowledge about what works in public-sector architecture — you get for the cost of learning it, not the cost of discovering it. That is the difference between funding a team to apply a proven method and funding consultants to invent one. The first is affordable and builds lasting capability in your own people; the second is neither.</a:t>
+            </a:r>
+          </a:p>
+        </p:txBody>
+      </p:sp>
+      <p:sp>
+        <p:nvSpPr>
+          <p:cNvPr id="4" name="Slide Number Placeholder 3"/>
+          <p:cNvSpPr>
+            <a:spLocks noGrp="1"/>
+          </p:cNvSpPr>
+          <p:nvPr>
+            <p:ph type="sldNum" idx="5" sz="quarter"/>
+          </p:nvPr>
+        </p:nvSpPr>
+        <p:spPr/>
+      </p:sp>
+    </p:spTree>
+  </p:cSld>
+  <p:clrMapOvr>
+    <a:masterClrMapping/>
+  </p:clrMapOvr>
+</p:notes>
+</file>
+
+<file path=ppt/notesSlides/notesSlide39.xml><?xml version="1.0" encoding="utf-8"?>
+<p:notes xmlns:a="http://schemas.openxmlformats.org/drawingml/2006/main" xmlns:p="http://schemas.openxmlformats.org/presentationml/2006/main" xmlns:r="http://schemas.openxmlformats.org/officeDocument/2006/relationships">
+  <p:cSld>
+    <p:spTree>
+      <p:nvGrpSpPr>
+        <p:cNvPr id="1" name=""/>
+        <p:cNvGrpSpPr/>
+        <p:nvPr/>
+      </p:nvGrpSpPr>
+      <p:grpSpPr>
+        <a:xfrm>
+          <a:off x="0" y="0"/>
+          <a:ext cx="0" cy="0"/>
+          <a:chOff x="0" y="0"/>
+          <a:chExt cx="0" cy="0"/>
+        </a:xfrm>
+      </p:grpSpPr>
+      <p:sp>
+        <p:nvSpPr>
+          <p:cNvPr id="2" name="Slide Image Placeholder 1"/>
+          <p:cNvSpPr>
+            <a:spLocks noGrp="1"/>
+          </p:cNvSpPr>
+          <p:nvPr>
+            <p:ph type="sldImg" idx="2"/>
+          </p:nvPr>
+        </p:nvSpPr>
+        <p:spPr/>
+      </p:sp>
+      <p:sp>
+        <p:nvSpPr>
+          <p:cNvPr id="3" name="Notes Placeholder 2"/>
+          <p:cNvSpPr>
+            <a:spLocks noGrp="1"/>
+          </p:cNvSpPr>
+          <p:nvPr>
+            <p:ph type="body" idx="3" sz="quarter"/>
+          </p:nvPr>
+        </p:nvSpPr>
+        <p:spPr/>
+        <p:txBody>
+          <a:bodyPr/>
+          <a:lstStyle/>
+          <a:p>
+            <a:r>
+              <a:t>VO: And aim the capability at your own people, not at a consultancy you will depend on forever. The reason to use open knowledge products is not only that they are cheaper. It is that they let you build the capability inside your own institutions — architects who learn the method, apply it, and stay, instead of expertise that walks out the door when a contract ends. A strategist's quiet goal in all of this is a national capability that outlasts any single contract or consultant. Open knowledge products are how you build it in your own people.</a:t>
+            </a:r>
+          </a:p>
+          <a:p/>
+          <a:p>
+            <a:r>
+              <a:t>Production cue: the pivotal slide of this video. Hold it a beat longer.</a:t>
+            </a:r>
+          </a:p>
+        </p:txBody>
+      </p:sp>
+      <p:sp>
+        <p:nvSpPr>
+          <p:cNvPr id="4" name="Slide Number Placeholder 3"/>
+          <p:cNvSpPr>
+            <a:spLocks noGrp="1"/>
+          </p:cNvSpPr>
+          <p:nvPr>
+            <p:ph type="sldNum" idx="5" sz="quarter"/>
+          </p:nvPr>
+        </p:nvSpPr>
+        <p:spPr/>
+      </p:sp>
+    </p:spTree>
+  </p:cSld>
+  <p:clrMapOvr>
+    <a:masterClrMapping/>
+  </p:clrMapOvr>
+</p:notes>
+</file>
+
+<file path=ppt/notesSlides/notesSlide40.xml><?xml version="1.0" encoding="utf-8"?>
+<p:notes xmlns:a="http://schemas.openxmlformats.org/drawingml/2006/main" xmlns:p="http://schemas.openxmlformats.org/presentationml/2006/main" xmlns:r="http://schemas.openxmlformats.org/officeDocument/2006/relationships">
+  <p:cSld>
+    <p:spTree>
+      <p:nvGrpSpPr>
+        <p:cNvPr id="1" name=""/>
+        <p:cNvGrpSpPr/>
+        <p:nvPr/>
+      </p:nvGrpSpPr>
+      <p:grpSpPr>
+        <a:xfrm>
+          <a:off x="0" y="0"/>
+          <a:ext cx="0" cy="0"/>
+          <a:chOff x="0" y="0"/>
+          <a:chExt cx="0" cy="0"/>
+        </a:xfrm>
+      </p:grpSpPr>
+      <p:sp>
+        <p:nvSpPr>
+          <p:cNvPr id="2" name="Slide Image Placeholder 1"/>
+          <p:cNvSpPr>
+            <a:spLocks noGrp="1"/>
+          </p:cNvSpPr>
+          <p:nvPr>
+            <p:ph type="sldImg" idx="2"/>
+          </p:nvPr>
+        </p:nvSpPr>
+        <p:spPr/>
+      </p:sp>
+      <p:sp>
+        <p:nvSpPr>
+          <p:cNvPr id="3" name="Notes Placeholder 2"/>
+          <p:cNvSpPr>
+            <a:spLocks noGrp="1"/>
+          </p:cNvSpPr>
+          <p:nvPr>
+            <p:ph type="body" idx="3" sz="quarter"/>
+          </p:nvPr>
+        </p:nvSpPr>
+        <p:spPr/>
+        <p:txBody>
+          <a:bodyPr/>
+          <a:lstStyle/>
+          <a:p>
+            <a:r>
+              <a:t>PRACTICE BOX (on-screen only — never read it, never paraphrase it, never point at it). It replaces the narrated handoff: this video ends on the recap and the Sources slide.</a:t>
+            </a:r>
+          </a:p>
+          <a:p/>
+          <a:p>
+            <a:r>
+              <a:t>VO: So capability is not the barrier it appears to be. The knowledge is documented, open and taught. Use it to grow your own architects, and you build something that lasts longer than any contract.</a:t>
+            </a:r>
+          </a:p>
+        </p:txBody>
+      </p:sp>
+      <p:sp>
+        <p:nvSpPr>
+          <p:cNvPr id="4" name="Slide Number Placeholder 3"/>
+          <p:cNvSpPr>
+            <a:spLocks noGrp="1"/>
+          </p:cNvSpPr>
+          <p:nvPr>
+            <p:ph type="sldNum" idx="5" sz="quarter"/>
+          </p:nvPr>
+        </p:nvSpPr>
+        <p:spPr/>
+      </p:sp>
+    </p:spTree>
+  </p:cSld>
+  <p:clrMapOvr>
+    <a:masterClrMapping/>
+  </p:clrMapOvr>
+</p:notes>
+</file>
+
+<file path=ppt/notesSlides/notesSlide41.xml><?xml version="1.0" encoding="utf-8"?>
 <p:notes xmlns:a="http://schemas.openxmlformats.org/drawingml/2006/main" xmlns:p="http://schemas.openxmlformats.org/presentationml/2006/main" xmlns:r="http://schemas.openxmlformats.org/officeDocument/2006/relationships">
   <p:cSld>
     <p:spTree>
@@ -11596,2042 +11596,6 @@
 </p:sldMaster>
 </file>
 
-<file path=ppt/slides/slide1.xml><?xml version="1.0" encoding="utf-8"?>
-<p:sld xmlns:a="http://schemas.openxmlformats.org/drawingml/2006/main" xmlns:r="http://schemas.openxmlformats.org/officeDocument/2006/relationships" xmlns:p="http://schemas.openxmlformats.org/presentationml/2006/main">
-  <p:cSld>
-    <p:spTree>
-      <p:nvGrpSpPr>
-        <p:cNvPr id="1" name=""/>
-        <p:cNvGrpSpPr/>
-        <p:nvPr/>
-      </p:nvGrpSpPr>
-      <p:grpSpPr>
-        <a:xfrm>
-          <a:off x="0" y="0"/>
-          <a:ext cx="0" cy="0"/>
-          <a:chOff x="0" y="0"/>
-          <a:chExt cx="0" cy="0"/>
-        </a:xfrm>
-      </p:grpSpPr>
-      <p:cxnSp>
-        <p:nvCxnSpPr>
-          <p:cNvPr id="11" name="Straight Connector 10">
-            <a:extLst>
-              <a:ext uri="{FF2B5EF4-FFF2-40B4-BE49-F238E27FC236}">
-                <a16:creationId xmlns:a16="http://schemas.microsoft.com/office/drawing/2014/main" id="{D9AD66F2-F7C0-4D03-9150-D28F17AC561D}"/>
-              </a:ext>
-            </a:extLst>
-          </p:cNvPr>
-          <p:cNvCxnSpPr>
-            <a:cxnSpLocks/>
-          </p:cNvCxnSpPr>
-          <p:nvPr/>
-        </p:nvCxnSpPr>
-        <p:spPr>
-          <a:xfrm>
-            <a:off x="373021" y="2198718"/>
-            <a:ext cx="6843567" cy="0"/>
-          </a:xfrm>
-          <a:prstGeom prst="line">
-            <a:avLst/>
-          </a:prstGeom>
-          <a:ln w="12700">
-            <a:solidFill>
-              <a:srgbClr val="009CD6"/>
-            </a:solidFill>
-          </a:ln>
-        </p:spPr>
-        <p:style>
-          <a:lnRef idx="1">
-            <a:schemeClr val="accent1"/>
-          </a:lnRef>
-          <a:fillRef idx="0">
-            <a:schemeClr val="accent1"/>
-          </a:fillRef>
-          <a:effectRef idx="0">
-            <a:schemeClr val="accent1"/>
-          </a:effectRef>
-          <a:fontRef idx="minor">
-            <a:schemeClr val="tx1"/>
-          </a:fontRef>
-        </p:style>
-      </p:cxnSp>
-      <p:sp>
-        <p:nvSpPr>
-          <p:cNvPr id="12" name="Title 9">
-            <a:extLst>
-              <a:ext uri="{FF2B5EF4-FFF2-40B4-BE49-F238E27FC236}">
-                <a16:creationId xmlns:a16="http://schemas.microsoft.com/office/drawing/2014/main" id="{EEB08032-CE0E-4986-AEDF-A41026C0E8B9}"/>
-              </a:ext>
-            </a:extLst>
-          </p:cNvPr>
-          <p:cNvSpPr txBox="1">
-            <a:spLocks/>
-          </p:cNvSpPr>
-          <p:nvPr/>
-        </p:nvSpPr>
-        <p:spPr>
-          <a:xfrm>
-            <a:off x="237734" y="702833"/>
-            <a:ext cx="6432007" cy="1218817"/>
-          </a:xfrm>
-          <a:prstGeom prst="rect">
-            <a:avLst/>
-          </a:prstGeom>
-        </p:spPr>
-        <p:txBody>
-          <a:bodyPr anchor="b">
-            <a:noAutofit/>
-          </a:bodyPr>
-          <a:lstStyle>
-            <a:lvl1pPr algn="l" defTabSz="914400" rtl="0" eaLnBrk="1" latinLnBrk="0" hangingPunct="1">
-              <a:lnSpc>
-                <a:spcPct val="90000"/>
-              </a:lnSpc>
-              <a:spcBef>
-                <a:spcPct val="0"/>
-              </a:spcBef>
-              <a:buNone/>
-              <a:defRPr sz="4000" kern="1200">
-                <a:solidFill>
-                  <a:schemeClr val="bg1"/>
-                </a:solidFill>
-                <a:latin typeface="Arial" panose="020B0604020202020204" pitchFamily="34" charset="0"/>
-                <a:ea typeface="+mj-ea"/>
-                <a:cs typeface="Arial" panose="020B0604020202020204" pitchFamily="34" charset="0"/>
-              </a:defRPr>
-            </a:lvl1pPr>
-          </a:lstStyle>
-          <a:p>
-            <a:r>
-              <a:rPr sz="2400" b="1" i="0">
-                <a:solidFill>
-                  <a:srgbClr val="1A1A1A"/>
-                </a:solidFill>
-                <a:latin typeface="Arial"/>
-              </a:rPr>
-              <a:t>5.5 — Build your team's capability with open knowledge products</a:t>
-            </a:r>
-          </a:p>
-        </p:txBody>
-      </p:sp>
-      <p:pic>
-        <p:nvPicPr>
-          <p:cNvPr id="7" name="Picture 6">
-            <a:extLst>
-              <a:ext uri="{FF2B5EF4-FFF2-40B4-BE49-F238E27FC236}">
-                <a16:creationId xmlns:a16="http://schemas.microsoft.com/office/drawing/2014/main" id="{A2066351-C569-4C4C-A096-308777FCDC32}"/>
-              </a:ext>
-            </a:extLst>
-          </p:cNvPr>
-          <p:cNvPicPr>
-            <a:picLocks noChangeAspect="1"/>
-          </p:cNvPicPr>
-          <p:nvPr/>
-        </p:nvPicPr>
-        <p:blipFill>
-          <a:blip r:embed="rId2">
-            <a:extLst>
-              <a:ext uri="{28A0092B-C50C-407E-A947-70E740481C1C}">
-                <a14:useLocalDpi xmlns:a14="http://schemas.microsoft.com/office/drawing/2010/main" val="0"/>
-              </a:ext>
-            </a:extLst>
-          </a:blip>
-          <a:srcRect t="20219" b="14729"/>
-          <a:stretch>
-            <a:fillRect/>
-          </a:stretch>
-        </p:blipFill>
-        <p:spPr>
-          <a:xfrm>
-            <a:off x="0" y="5620871"/>
-            <a:ext cx="1323975" cy="1218816"/>
-          </a:xfrm>
-          <a:prstGeom prst="rect">
-            <a:avLst/>
-          </a:prstGeom>
-        </p:spPr>
-      </p:pic>
-      <p:sp>
-        <p:nvSpPr>
-          <p:cNvPr id="14" name="Title 9">
-            <a:extLst>
-              <a:ext uri="{FF2B5EF4-FFF2-40B4-BE49-F238E27FC236}">
-                <a16:creationId xmlns:a16="http://schemas.microsoft.com/office/drawing/2014/main" id="{B5087B80-3EE4-1881-0130-ED58CA625092}"/>
-              </a:ext>
-            </a:extLst>
-          </p:cNvPr>
-          <p:cNvSpPr txBox="1">
-            <a:spLocks/>
-          </p:cNvSpPr>
-          <p:nvPr/>
-        </p:nvSpPr>
-        <p:spPr>
-          <a:xfrm>
-            <a:off x="284452" y="2475786"/>
-            <a:ext cx="6382893" cy="953213"/>
-          </a:xfrm>
-          <a:prstGeom prst="rect">
-            <a:avLst/>
-          </a:prstGeom>
-        </p:spPr>
-        <p:txBody>
-          <a:bodyPr anchor="t">
-            <a:noAutofit/>
-          </a:bodyPr>
-          <a:lstStyle>
-            <a:lvl1pPr algn="l" defTabSz="914400" rtl="0" eaLnBrk="1" latinLnBrk="0" hangingPunct="1">
-              <a:lnSpc>
-                <a:spcPct val="90000"/>
-              </a:lnSpc>
-              <a:spcBef>
-                <a:spcPct val="0"/>
-              </a:spcBef>
-              <a:buNone/>
-              <a:defRPr sz="4000" kern="1200">
-                <a:solidFill>
-                  <a:schemeClr val="bg1"/>
-                </a:solidFill>
-                <a:latin typeface="Arial" panose="020B0604020202020204" pitchFamily="34" charset="0"/>
-                <a:ea typeface="+mj-ea"/>
-                <a:cs typeface="Arial" panose="020B0604020202020204" pitchFamily="34" charset="0"/>
-              </a:defRPr>
-            </a:lvl1pPr>
-          </a:lstStyle>
-          <a:p>
-            <a:pPr marL="0" marR="0" lvl="0" indent="0" rtl="0">
-              <a:spcBef>
-                <a:spcPts val="600"/>
-              </a:spcBef>
-              <a:spcAft>
-                <a:spcPts val="0"/>
-              </a:spcAft>
-              <a:buNone/>
-            </a:pPr>
-            <a:r>
-              <a:rPr sz="1300" b="1" i="0">
-                <a:solidFill>
-                  <a:srgbClr val="006E96"/>
-                </a:solidFill>
-                <a:latin typeface="Arial"/>
-              </a:rPr>
-              <a:t>KP1 · Government Enterprise Architecture · Module 5 · Video 5.5</a:t>
-            </a:r>
-          </a:p>
-          <a:p>
-            <a:r>
-              <a:rPr sz="1200" b="0" i="1">
-                <a:solidFill>
-                  <a:srgbClr val="595959"/>
-                </a:solidFill>
-                <a:latin typeface="Arial"/>
-              </a:rPr>
-              <a:t>You don't have to train your team from scratch — open knowledge products, a shared framework, and a community of practising countries mean your people can learn the method from materials that already exist, freeing your budget for the work itself.</a:t>
-            </a:r>
-          </a:p>
-        </p:txBody>
-      </p:sp>
-      <p:sp>
-        <p:nvSpPr>
-          <p:cNvPr id="17" name="Title 9">
-            <a:extLst>
-              <a:ext uri="{FF2B5EF4-FFF2-40B4-BE49-F238E27FC236}">
-                <a16:creationId xmlns:a16="http://schemas.microsoft.com/office/drawing/2014/main" id="{5E8796F7-DD26-D250-5E97-B38B22298E72}"/>
-              </a:ext>
-            </a:extLst>
-          </p:cNvPr>
-          <p:cNvSpPr txBox="1">
-            <a:spLocks/>
-          </p:cNvSpPr>
-          <p:nvPr/>
-        </p:nvSpPr>
-        <p:spPr>
-          <a:xfrm>
-            <a:off x="284452" y="4363897"/>
-            <a:ext cx="6382893" cy="953213"/>
-          </a:xfrm>
-          <a:prstGeom prst="rect">
-            <a:avLst/>
-          </a:prstGeom>
-        </p:spPr>
-        <p:txBody>
-          <a:bodyPr anchor="t">
-            <a:noAutofit/>
-          </a:bodyPr>
-          <a:lstStyle>
-            <a:lvl1pPr algn="l" defTabSz="914400" rtl="0" eaLnBrk="1" latinLnBrk="0" hangingPunct="1">
-              <a:lnSpc>
-                <a:spcPct val="90000"/>
-              </a:lnSpc>
-              <a:spcBef>
-                <a:spcPct val="0"/>
-              </a:spcBef>
-              <a:buNone/>
-              <a:defRPr sz="4000" kern="1200">
-                <a:solidFill>
-                  <a:schemeClr val="bg1"/>
-                </a:solidFill>
-                <a:latin typeface="Arial" panose="020B0604020202020204" pitchFamily="34" charset="0"/>
-                <a:ea typeface="+mj-ea"/>
-                <a:cs typeface="Arial" panose="020B0604020202020204" pitchFamily="34" charset="0"/>
-              </a:defRPr>
-            </a:lvl1pPr>
-          </a:lstStyle>
-          <a:p>
-            <a:pPr marL="0" marR="0" lvl="0" indent="0" rtl="0">
-              <a:spcBef>
-                <a:spcPts val="600"/>
-              </a:spcBef>
-              <a:spcAft>
-                <a:spcPts val="1200"/>
-              </a:spcAft>
-              <a:buNone/>
-            </a:pPr>
-            <a:r>
-              <a:rPr sz="1400" b="1" i="0">
-                <a:solidFill>
-                  <a:srgbClr val="1A1A1A"/>
-                </a:solidFill>
-                <a:latin typeface="Arial"/>
-              </a:rPr>
-              <a:t>Length: </a:t>
-            </a:r>
-            <a:r>
-              <a:rPr sz="1400" b="0" i="0">
-                <a:solidFill>
-                  <a:srgbClr val="1A1A1A"/>
-                </a:solidFill>
-                <a:latin typeface="Arial"/>
-              </a:rPr>
-              <a:t>~4 mins</a:t>
-            </a:r>
-          </a:p>
-          <a:p>
-            <a:r>
-              <a:rPr sz="1400" b="1" i="0">
-                <a:solidFill>
-                  <a:srgbClr val="1A1A1A"/>
-                </a:solidFill>
-                <a:latin typeface="Arial"/>
-              </a:rPr>
-              <a:t>Target audience: </a:t>
-            </a:r>
-            <a:r>
-              <a:rPr sz="1400" b="0" i="0">
-                <a:solidFill>
-                  <a:srgbClr val="1A1A1A"/>
-                </a:solidFill>
-                <a:latin typeface="Arial"/>
-              </a:rPr>
-              <a:t>Director-general · head of a sectoral ICT unit · technical secretary</a:t>
-            </a:r>
-          </a:p>
-        </p:txBody>
-      </p:sp>
-      <p:sp>
-        <p:nvSpPr>
-          <p:cNvPr id="18" name="Rectangle 17"/>
-          <p:cNvSpPr/>
-          <p:nvPr/>
-        </p:nvSpPr>
-        <p:spPr>
-          <a:xfrm>
-            <a:off x="7022592" y="0"/>
-            <a:ext cx="5169103" cy="6858000"/>
-          </a:xfrm>
-          <a:prstGeom prst="rect">
-            <a:avLst/>
-          </a:prstGeom>
-          <a:solidFill>
-            <a:srgbClr val="009CD6"/>
-          </a:solidFill>
-          <a:ln>
-            <a:noFill/>
-          </a:ln>
-          <a:effectLst/>
-        </p:spPr>
-        <p:style>
-          <a:lnRef idx="1">
-            <a:schemeClr val="accent1"/>
-          </a:lnRef>
-          <a:fillRef idx="3">
-            <a:schemeClr val="accent1"/>
-          </a:fillRef>
-          <a:effectRef idx="2">
-            <a:schemeClr val="accent1"/>
-          </a:effectRef>
-          <a:fontRef idx="minor">
-            <a:schemeClr val="lt1"/>
-          </a:fontRef>
-        </p:style>
-        <p:txBody>
-          <a:bodyPr rtlCol="0" anchor="ctr"/>
-          <a:lstStyle/>
-          <a:p>
-            <a:pPr algn="ctr"/>
-          </a:p>
-        </p:txBody>
-      </p:sp>
-      <p:sp>
-        <p:nvSpPr>
-          <p:cNvPr id="19" name="TextBox 18"/>
-          <p:cNvSpPr txBox="1"/>
-          <p:nvPr/>
-        </p:nvSpPr>
-        <p:spPr>
-          <a:xfrm>
-            <a:off x="7452360" y="457200"/>
-            <a:ext cx="4297680" cy="457200"/>
-          </a:xfrm>
-          <a:prstGeom prst="rect">
-            <a:avLst/>
-          </a:prstGeom>
-          <a:noFill/>
-        </p:spPr>
-        <p:txBody>
-          <a:bodyPr wrap="square">
-            <a:spAutoFit/>
-          </a:bodyPr>
-          <a:lstStyle/>
-          <a:p>
-            <a:r>
-              <a:rPr sz="1100" b="1" i="0">
-                <a:solidFill>
-                  <a:srgbClr val="E5F5FB"/>
-                </a:solidFill>
-                <a:latin typeface="Arial"/>
-              </a:rPr>
-              <a:t>THE CASE YOU CARRY INTO THE ROOM</a:t>
-            </a:r>
-          </a:p>
-        </p:txBody>
-      </p:sp>
-      <p:sp>
-        <p:nvSpPr>
-          <p:cNvPr id="20" name="Rounded Rectangle 19"/>
-          <p:cNvSpPr/>
-          <p:nvPr/>
-        </p:nvSpPr>
-        <p:spPr>
-          <a:xfrm>
-            <a:off x="7452360" y="960120"/>
-            <a:ext cx="3840480" cy="658368"/>
-          </a:xfrm>
-          <a:prstGeom prst="roundRect">
-            <a:avLst>
-              <a:gd name="adj" fmla="val 14000"/>
-            </a:avLst>
-          </a:prstGeom>
-          <a:solidFill>
-            <a:srgbClr val="FFFFFF"/>
-          </a:solidFill>
-          <a:ln>
-            <a:noFill/>
-          </a:ln>
-          <a:effectLst/>
-        </p:spPr>
-        <p:style>
-          <a:lnRef idx="1">
-            <a:schemeClr val="accent1"/>
-          </a:lnRef>
-          <a:fillRef idx="3">
-            <a:schemeClr val="accent1"/>
-          </a:fillRef>
-          <a:effectRef idx="2">
-            <a:schemeClr val="accent1"/>
-          </a:effectRef>
-          <a:fontRef idx="minor">
-            <a:schemeClr val="lt1"/>
-          </a:fontRef>
-        </p:style>
-        <p:txBody>
-          <a:bodyPr rtlCol="0" anchor="ctr" lIns="164592" wrap="square"/>
-          <a:lstStyle/>
-          <a:p>
-            <a:pPr algn="ctr"/>
-            <a:r>
-              <a:rPr sz="1500" b="1" i="0">
-                <a:solidFill>
-                  <a:srgbClr val="1A1A1A"/>
-                </a:solidFill>
-                <a:latin typeface="Arial"/>
-              </a:rPr>
-              <a:t>Proven — four real governments</a:t>
-            </a:r>
-          </a:p>
-        </p:txBody>
-      </p:sp>
-      <p:sp>
-        <p:nvSpPr>
-          <p:cNvPr id="21" name="Rounded Rectangle 20"/>
-          <p:cNvSpPr/>
-          <p:nvPr/>
-        </p:nvSpPr>
-        <p:spPr>
-          <a:xfrm>
-            <a:off x="7452360" y="1892808"/>
-            <a:ext cx="3840480" cy="658368"/>
-          </a:xfrm>
-          <a:prstGeom prst="roundRect">
-            <a:avLst>
-              <a:gd name="adj" fmla="val 14000"/>
-            </a:avLst>
-          </a:prstGeom>
-          <a:solidFill>
-            <a:srgbClr val="FFFFFF"/>
-          </a:solidFill>
-          <a:ln>
-            <a:noFill/>
-          </a:ln>
-          <a:effectLst/>
-        </p:spPr>
-        <p:style>
-          <a:lnRef idx="1">
-            <a:schemeClr val="accent1"/>
-          </a:lnRef>
-          <a:fillRef idx="3">
-            <a:schemeClr val="accent1"/>
-          </a:fillRef>
-          <a:effectRef idx="2">
-            <a:schemeClr val="accent1"/>
-          </a:effectRef>
-          <a:fontRef idx="minor">
-            <a:schemeClr val="lt1"/>
-          </a:fontRef>
-        </p:style>
-        <p:txBody>
-          <a:bodyPr rtlCol="0" anchor="ctr" lIns="164592" wrap="square"/>
-          <a:lstStyle/>
-          <a:p>
-            <a:pPr algn="ctr"/>
-            <a:r>
-              <a:rPr sz="1500" b="1" i="0">
-                <a:solidFill>
-                  <a:srgbClr val="1A1A1A"/>
-                </a:solidFill>
-                <a:latin typeface="Arial"/>
-              </a:rPr>
-              <a:t>Portable — sector after sector</a:t>
-            </a:r>
-          </a:p>
-        </p:txBody>
-      </p:sp>
-      <p:sp>
-        <p:nvSpPr>
-          <p:cNvPr id="22" name="Rounded Rectangle 21"/>
-          <p:cNvSpPr/>
-          <p:nvPr/>
-        </p:nvSpPr>
-        <p:spPr>
-          <a:xfrm>
-            <a:off x="7452360" y="2825496"/>
-            <a:ext cx="3840480" cy="658368"/>
-          </a:xfrm>
-          <a:prstGeom prst="roundRect">
-            <a:avLst>
-              <a:gd name="adj" fmla="val 14000"/>
-            </a:avLst>
-          </a:prstGeom>
-          <a:solidFill>
-            <a:srgbClr val="FFFFFF"/>
-          </a:solidFill>
-          <a:ln>
-            <a:noFill/>
-          </a:ln>
-          <a:effectLst/>
-        </p:spPr>
-        <p:style>
-          <a:lnRef idx="1">
-            <a:schemeClr val="accent1"/>
-          </a:lnRef>
-          <a:fillRef idx="3">
-            <a:schemeClr val="accent1"/>
-          </a:fillRef>
-          <a:effectRef idx="2">
-            <a:schemeClr val="accent1"/>
-          </a:effectRef>
-          <a:fontRef idx="minor">
-            <a:schemeClr val="lt1"/>
-          </a:fontRef>
-        </p:style>
-        <p:txBody>
-          <a:bodyPr rtlCol="0" anchor="ctr" lIns="164592" wrap="square"/>
-          <a:lstStyle/>
-          <a:p>
-            <a:pPr algn="ctr"/>
-            <a:r>
-              <a:rPr sz="1500" b="1" i="0">
-                <a:solidFill>
-                  <a:srgbClr val="1A1A1A"/>
-                </a:solidFill>
-                <a:latin typeface="Arial"/>
-              </a:rPr>
-              <a:t>The commitment — the one page</a:t>
-            </a:r>
-          </a:p>
-        </p:txBody>
-      </p:sp>
-      <p:sp>
-        <p:nvSpPr>
-          <p:cNvPr id="23" name="Rounded Rectangle 22"/>
-          <p:cNvSpPr/>
-          <p:nvPr/>
-        </p:nvSpPr>
-        <p:spPr>
-          <a:xfrm>
-            <a:off x="7452360" y="3758184"/>
-            <a:ext cx="3840480" cy="658368"/>
-          </a:xfrm>
-          <a:prstGeom prst="roundRect">
-            <a:avLst>
-              <a:gd name="adj" fmla="val 14000"/>
-            </a:avLst>
-          </a:prstGeom>
-          <a:solidFill>
-            <a:srgbClr val="FFFFFF"/>
-          </a:solidFill>
-          <a:ln>
-            <a:noFill/>
-          </a:ln>
-          <a:effectLst/>
-        </p:spPr>
-        <p:style>
-          <a:lnRef idx="1">
-            <a:schemeClr val="accent1"/>
-          </a:lnRef>
-          <a:fillRef idx="3">
-            <a:schemeClr val="accent1"/>
-          </a:fillRef>
-          <a:effectRef idx="2">
-            <a:schemeClr val="accent1"/>
-          </a:effectRef>
-          <a:fontRef idx="minor">
-            <a:schemeClr val="lt1"/>
-          </a:fontRef>
-        </p:style>
-        <p:txBody>
-          <a:bodyPr rtlCol="0" anchor="ctr" lIns="164592" wrap="square"/>
-          <a:lstStyle/>
-          <a:p>
-            <a:pPr algn="ctr"/>
-            <a:r>
-              <a:rPr sz="1500" b="1" i="0">
-                <a:solidFill>
-                  <a:srgbClr val="1A1A1A"/>
-                </a:solidFill>
-                <a:latin typeface="Arial"/>
-              </a:rPr>
-              <a:t>The capability — your own people</a:t>
-            </a:r>
-          </a:p>
-        </p:txBody>
-      </p:sp>
-      <p:sp>
-        <p:nvSpPr>
-          <p:cNvPr id="24" name="Rounded Rectangle 23"/>
-          <p:cNvSpPr/>
-          <p:nvPr/>
-        </p:nvSpPr>
-        <p:spPr>
-          <a:xfrm>
-            <a:off x="7452360" y="4690872"/>
-            <a:ext cx="3840480" cy="658368"/>
-          </a:xfrm>
-          <a:prstGeom prst="roundRect">
-            <a:avLst>
-              <a:gd name="adj" fmla="val 14000"/>
-            </a:avLst>
-          </a:prstGeom>
-          <a:solidFill>
-            <a:srgbClr val="006E96"/>
-          </a:solidFill>
-          <a:ln>
-            <a:noFill/>
-          </a:ln>
-          <a:effectLst/>
-        </p:spPr>
-        <p:style>
-          <a:lnRef idx="1">
-            <a:schemeClr val="accent1"/>
-          </a:lnRef>
-          <a:fillRef idx="3">
-            <a:schemeClr val="accent1"/>
-          </a:fillRef>
-          <a:effectRef idx="2">
-            <a:schemeClr val="accent1"/>
-          </a:effectRef>
-          <a:fontRef idx="minor">
-            <a:schemeClr val="lt1"/>
-          </a:fontRef>
-        </p:style>
-        <p:txBody>
-          <a:bodyPr rtlCol="0" anchor="ctr" lIns="164592" wrap="square"/>
-          <a:lstStyle/>
-          <a:p>
-            <a:pPr algn="ctr"/>
-            <a:r>
-              <a:rPr sz="1500" b="1" i="0">
-                <a:solidFill>
-                  <a:srgbClr val="FFFFFF"/>
-                </a:solidFill>
-                <a:latin typeface="Arial"/>
-              </a:rPr>
-              <a:t>Necessary now, not just useful</a:t>
-            </a:r>
-          </a:p>
-        </p:txBody>
-      </p:sp>
-      <p:sp>
-        <p:nvSpPr>
-          <p:cNvPr id="25" name="TextBox 24"/>
-          <p:cNvSpPr txBox="1"/>
-          <p:nvPr/>
-        </p:nvSpPr>
-        <p:spPr>
-          <a:xfrm>
-            <a:off x="7452360" y="5806440"/>
-            <a:ext cx="4297680" cy="731520"/>
-          </a:xfrm>
-          <a:prstGeom prst="rect">
-            <a:avLst/>
-          </a:prstGeom>
-          <a:noFill/>
-        </p:spPr>
-        <p:txBody>
-          <a:bodyPr wrap="square">
-            <a:spAutoFit/>
-          </a:bodyPr>
-          <a:lstStyle/>
-          <a:p>
-            <a:r>
-              <a:rPr sz="1200" b="0" i="0">
-                <a:solidFill>
-                  <a:srgbClr val="FFFFFF"/>
-                </a:solidFill>
-                <a:latin typeface="Arial"/>
-              </a:rPr>
-              <a:t>4 governments · 4 killers to design out · 1 page for the minister</a:t>
-            </a:r>
-          </a:p>
-        </p:txBody>
-      </p:sp>
-    </p:spTree>
-    <p:extLst>
-      <p:ext uri="{BB962C8B-B14F-4D97-AF65-F5344CB8AC3E}">
-        <p14:creationId xmlns:p14="http://schemas.microsoft.com/office/powerpoint/2010/main" val="1196800265"/>
-      </p:ext>
-    </p:extLst>
-  </p:cSld>
-  <p:clrMapOvr>
-    <a:masterClrMapping/>
-  </p:clrMapOvr>
-</p:sld>
-</file>
-
-<file path=ppt/slides/slide30.xml><?xml version="1.0" encoding="utf-8"?>
-<p:sld xmlns:a="http://schemas.openxmlformats.org/drawingml/2006/main" xmlns:p="http://schemas.openxmlformats.org/presentationml/2006/main" xmlns:r="http://schemas.openxmlformats.org/officeDocument/2006/relationships">
-  <p:cSld>
-    <p:spTree>
-      <p:nvGrpSpPr>
-        <p:cNvPr id="1" name=""/>
-        <p:cNvGrpSpPr/>
-        <p:nvPr/>
-      </p:nvGrpSpPr>
-      <p:grpSpPr/>
-      <p:sp>
-        <p:nvSpPr>
-          <p:cNvPr id="2" name="TextBox 1"/>
-          <p:cNvSpPr txBox="1"/>
-          <p:nvPr/>
-        </p:nvSpPr>
-        <p:spPr>
-          <a:xfrm>
-            <a:off x="822960" y="822960"/>
-            <a:ext cx="7315200" cy="457200"/>
-          </a:xfrm>
-          <a:prstGeom prst="rect">
-            <a:avLst/>
-          </a:prstGeom>
-          <a:noFill/>
-        </p:spPr>
-        <p:txBody>
-          <a:bodyPr wrap="square">
-            <a:spAutoFit/>
-          </a:bodyPr>
-          <a:lstStyle/>
-          <a:p>
-            <a:r>
-              <a:rPr sz="1200" b="1" i="0">
-                <a:solidFill>
-                  <a:srgbClr val="595959"/>
-                </a:solidFill>
-                <a:latin typeface="Arial"/>
-              </a:rPr>
-              <a:t>KP1 · MODULE 5 · VIDEO 5.5</a:t>
-            </a:r>
-          </a:p>
-        </p:txBody>
-      </p:sp>
-      <p:sp>
-        <p:nvSpPr>
-          <p:cNvPr id="3" name="TextBox 2"/>
-          <p:cNvSpPr txBox="1"/>
-          <p:nvPr/>
-        </p:nvSpPr>
-        <p:spPr>
-          <a:xfrm>
-            <a:off x="822960" y="1828800"/>
-            <a:ext cx="2011680" cy="1097280"/>
-          </a:xfrm>
-          <a:prstGeom prst="rect">
-            <a:avLst/>
-          </a:prstGeom>
-          <a:noFill/>
-        </p:spPr>
-        <p:txBody>
-          <a:bodyPr wrap="square">
-            <a:spAutoFit/>
-          </a:bodyPr>
-          <a:lstStyle/>
-          <a:p>
-            <a:r>
-              <a:rPr sz="6000" b="1" i="0">
-                <a:solidFill>
-                  <a:srgbClr val="009CD6"/>
-                </a:solidFill>
-                <a:latin typeface="Arial"/>
-              </a:rPr>
-              <a:t>5.5</a:t>
-            </a:r>
-          </a:p>
-        </p:txBody>
-      </p:sp>
-      <p:sp>
-        <p:nvSpPr>
-          <p:cNvPr id="4" name="TextBox 3"/>
-          <p:cNvSpPr txBox="1"/>
-          <p:nvPr/>
-        </p:nvSpPr>
-        <p:spPr>
-          <a:xfrm>
-            <a:off x="822960" y="2880360"/>
-            <a:ext cx="9601200" cy="1371600"/>
-          </a:xfrm>
-          <a:prstGeom prst="rect">
-            <a:avLst/>
-          </a:prstGeom>
-          <a:noFill/>
-        </p:spPr>
-        <p:txBody>
-          <a:bodyPr wrap="square">
-            <a:spAutoFit/>
-          </a:bodyPr>
-          <a:lstStyle/>
-          <a:p>
-            <a:r>
-              <a:rPr sz="3400" b="1" i="0">
-                <a:solidFill>
-                  <a:srgbClr val="1A1A1A"/>
-                </a:solidFill>
-                <a:latin typeface="Arial"/>
-              </a:rPr>
-              <a:t>Build your team's capability with open knowledge products</a:t>
-            </a:r>
-          </a:p>
-        </p:txBody>
-      </p:sp>
-      <p:sp>
-        <p:nvSpPr>
-          <p:cNvPr id="5" name="TextBox 4"/>
-          <p:cNvSpPr txBox="1"/>
-          <p:nvPr/>
-        </p:nvSpPr>
-        <p:spPr>
-          <a:xfrm>
-            <a:off x="822960" y="4343400"/>
-            <a:ext cx="9875520" cy="1554480"/>
-          </a:xfrm>
-          <a:prstGeom prst="rect">
-            <a:avLst/>
-          </a:prstGeom>
-          <a:noFill/>
-        </p:spPr>
-        <p:txBody>
-          <a:bodyPr wrap="square">
-            <a:spAutoFit/>
-          </a:bodyPr>
-          <a:lstStyle/>
-          <a:p>
-            <a:r>
-              <a:rPr sz="1700" b="0" i="1">
-                <a:solidFill>
-                  <a:srgbClr val="595959"/>
-                </a:solidFill>
-                <a:latin typeface="Arial"/>
-              </a:rPr>
-              <a:t>You don't have to train your team from scratch — open knowledge products, a shared framework, and a community of practising countries mean your people can learn the method from materials that already exist, freeing your budget for the work itself.</a:t>
-            </a:r>
-          </a:p>
-        </p:txBody>
-      </p:sp>
-      <p:sp>
-        <p:nvSpPr>
-          <p:cNvPr id="6" name="TextBox 5"/>
-          <p:cNvSpPr txBox="1"/>
-          <p:nvPr/>
-        </p:nvSpPr>
-        <p:spPr>
-          <a:xfrm>
-            <a:off x="822960" y="5989320"/>
-            <a:ext cx="7315200" cy="365760"/>
-          </a:xfrm>
-          <a:prstGeom prst="rect">
-            <a:avLst/>
-          </a:prstGeom>
-          <a:noFill/>
-        </p:spPr>
-        <p:txBody>
-          <a:bodyPr wrap="square">
-            <a:spAutoFit/>
-          </a:bodyPr>
-          <a:lstStyle/>
-          <a:p>
-            <a:r>
-              <a:rPr sz="1200" b="0" i="0">
-                <a:solidFill>
-                  <a:srgbClr val="595959"/>
-                </a:solidFill>
-                <a:latin typeface="Arial"/>
-              </a:rPr>
-              <a:t>~4 minutes · standalone video · voice-over on text slides</a:t>
-            </a:r>
-          </a:p>
-        </p:txBody>
-      </p:sp>
-    </p:spTree>
-  </p:cSld>
-  <p:clrMapOvr>
-    <a:masterClrMapping/>
-  </p:clrMapOvr>
-</p:sld>
-</file>
-
-<file path=ppt/slides/slide31.xml><?xml version="1.0" encoding="utf-8"?>
-<p:sld xmlns:a="http://schemas.openxmlformats.org/drawingml/2006/main" xmlns:p="http://schemas.openxmlformats.org/presentationml/2006/main" xmlns:r="http://schemas.openxmlformats.org/officeDocument/2006/relationships">
-  <p:cSld>
-    <p:spTree>
-      <p:nvGrpSpPr>
-        <p:cNvPr id="1" name=""/>
-        <p:cNvGrpSpPr/>
-        <p:nvPr/>
-      </p:nvGrpSpPr>
-      <p:grpSpPr/>
-      <p:sp>
-        <p:nvSpPr>
-          <p:cNvPr id="2" name="Rectangle 1"/>
-          <p:cNvSpPr/>
-          <p:nvPr/>
-        </p:nvSpPr>
-        <p:spPr>
-          <a:xfrm>
-            <a:off x="457200" y="384048"/>
-            <a:ext cx="45720" cy="256032"/>
-          </a:xfrm>
-          <a:prstGeom prst="rect">
-            <a:avLst/>
-          </a:prstGeom>
-          <a:solidFill>
-            <a:srgbClr val="009CD6"/>
-          </a:solidFill>
-          <a:ln>
-            <a:noFill/>
-          </a:ln>
-          <a:effectLst/>
-        </p:spPr>
-        <p:style>
-          <a:lnRef idx="1">
-            <a:schemeClr val="accent1"/>
-          </a:lnRef>
-          <a:fillRef idx="3">
-            <a:schemeClr val="accent1"/>
-          </a:fillRef>
-          <a:effectRef idx="2">
-            <a:schemeClr val="accent1"/>
-          </a:effectRef>
-          <a:fontRef idx="minor">
-            <a:schemeClr val="lt1"/>
-          </a:fontRef>
-        </p:style>
-        <p:txBody>
-          <a:bodyPr rtlCol="0" anchor="ctr"/>
-          <a:lstStyle/>
-          <a:p>
-            <a:pPr algn="ctr"/>
-          </a:p>
-        </p:txBody>
-      </p:sp>
-      <p:sp>
-        <p:nvSpPr>
-          <p:cNvPr id="3" name="TextBox 2"/>
-          <p:cNvSpPr txBox="1"/>
-          <p:nvPr/>
-        </p:nvSpPr>
-        <p:spPr>
-          <a:xfrm>
-            <a:off x="621792" y="274320"/>
-            <a:ext cx="11247120" cy="914400"/>
-          </a:xfrm>
-          <a:prstGeom prst="rect">
-            <a:avLst/>
-          </a:prstGeom>
-          <a:noFill/>
-        </p:spPr>
-        <p:txBody>
-          <a:bodyPr wrap="square">
-            <a:spAutoFit/>
-          </a:bodyPr>
-          <a:lstStyle/>
-          <a:p>
-            <a:r>
-              <a:rPr sz="2800" b="1" i="0">
-                <a:solidFill>
-                  <a:srgbClr val="1A1A1A"/>
-                </a:solidFill>
-                <a:latin typeface="Arial"/>
-              </a:rPr>
-              <a:t>The method is not locked in a consultant's head</a:t>
-            </a:r>
-          </a:p>
-        </p:txBody>
-      </p:sp>
-      <p:sp>
-        <p:nvSpPr>
-          <p:cNvPr id="4" name="TextBox 3"/>
-          <p:cNvSpPr txBox="1"/>
-          <p:nvPr/>
-        </p:nvSpPr>
-        <p:spPr>
-          <a:xfrm>
-            <a:off x="658368" y="1600200"/>
-            <a:ext cx="10881360" cy="2194560"/>
-          </a:xfrm>
-          <a:prstGeom prst="rect">
-            <a:avLst/>
-          </a:prstGeom>
-          <a:noFill/>
-        </p:spPr>
-        <p:txBody>
-          <a:bodyPr wrap="square">
-            <a:spAutoFit/>
-          </a:bodyPr>
-          <a:lstStyle/>
-          <a:p>
-            <a:pPr>
-              <a:spcAft>
-                <a:spcPts val="1200"/>
-              </a:spcAft>
-            </a:pPr>
-            <a:r>
-              <a:rPr sz="2000" b="0" i="0">
-                <a:solidFill>
-                  <a:srgbClr val="1A1A1A"/>
-                </a:solidFill>
-                <a:latin typeface="Arial"/>
-              </a:rPr>
-              <a:t>The reference architecture is published. The building-block specifications are open. The knowledge products — videos, written guides, worked examples — are made to teach a practising architect the method step by step.</a:t>
-            </a:r>
-          </a:p>
-          <a:p>
-            <a:pPr>
-              <a:spcAft>
-                <a:spcPts val="1200"/>
-              </a:spcAft>
-            </a:pPr>
-            <a:r>
-              <a:rPr sz="2000" b="0" i="0">
-                <a:solidFill>
-                  <a:srgbClr val="1A1A1A"/>
-                </a:solidFill>
-                <a:latin typeface="Arial"/>
-              </a:rPr>
-              <a:t>Your team does not start from a blank page. They start from a documented method that other countries are already using.</a:t>
-            </a:r>
-          </a:p>
-        </p:txBody>
-      </p:sp>
-      <p:sp>
-        <p:nvSpPr>
-          <p:cNvPr id="5" name="Rounded Rectangle 4"/>
-          <p:cNvSpPr/>
-          <p:nvPr/>
-        </p:nvSpPr>
-        <p:spPr>
-          <a:xfrm>
-            <a:off x="658368" y="3977639"/>
-            <a:ext cx="10881360" cy="1325880"/>
-          </a:xfrm>
-          <a:prstGeom prst="roundRect">
-            <a:avLst>
-              <a:gd name="adj" fmla="val 4500"/>
-            </a:avLst>
-          </a:prstGeom>
-          <a:solidFill>
-            <a:srgbClr val="E5F5FB"/>
-          </a:solidFill>
-          <a:ln>
-            <a:noFill/>
-          </a:ln>
-          <a:effectLst/>
-        </p:spPr>
-        <p:style>
-          <a:lnRef idx="1">
-            <a:schemeClr val="accent1"/>
-          </a:lnRef>
-          <a:fillRef idx="3">
-            <a:schemeClr val="accent1"/>
-          </a:fillRef>
-          <a:effectRef idx="2">
-            <a:schemeClr val="accent1"/>
-          </a:effectRef>
-          <a:fontRef idx="minor">
-            <a:schemeClr val="lt1"/>
-          </a:fontRef>
-        </p:style>
-        <p:txBody>
-          <a:bodyPr rtlCol="0" anchor="ctr"/>
-          <a:lstStyle/>
-          <a:p>
-            <a:pPr algn="ctr"/>
-          </a:p>
-        </p:txBody>
-      </p:sp>
-      <p:sp>
-        <p:nvSpPr>
-          <p:cNvPr id="6" name="TextBox 5"/>
-          <p:cNvSpPr txBox="1"/>
-          <p:nvPr/>
-        </p:nvSpPr>
-        <p:spPr>
-          <a:xfrm>
-            <a:off x="859536" y="4169663"/>
-            <a:ext cx="10479024" cy="1051560"/>
-          </a:xfrm>
-          <a:prstGeom prst="rect">
-            <a:avLst/>
-          </a:prstGeom>
-          <a:noFill/>
-        </p:spPr>
-        <p:txBody>
-          <a:bodyPr wrap="square">
-            <a:spAutoFit/>
-          </a:bodyPr>
-          <a:lstStyle/>
-          <a:p>
-            <a:pPr>
-              <a:spcAft>
-                <a:spcPts val="700"/>
-              </a:spcAft>
-            </a:pPr>
-            <a:r>
-              <a:rPr sz="2300" b="1" i="0">
-                <a:solidFill>
-                  <a:srgbClr val="006E96"/>
-                </a:solidFill>
-                <a:latin typeface="Arial"/>
-              </a:rPr>
-              <a:t>Your training cost is a fraction of building the knowledge yourself.</a:t>
-            </a:r>
-          </a:p>
-        </p:txBody>
-      </p:sp>
-      <p:sp>
-        <p:nvSpPr>
-          <p:cNvPr id="7" name="TextBox 6"/>
-          <p:cNvSpPr txBox="1"/>
-          <p:nvPr/>
-        </p:nvSpPr>
-        <p:spPr>
-          <a:xfrm>
-            <a:off x="457200" y="6473952"/>
-            <a:ext cx="7772400" cy="292608"/>
-          </a:xfrm>
-          <a:prstGeom prst="rect">
-            <a:avLst/>
-          </a:prstGeom>
-          <a:noFill/>
-        </p:spPr>
-        <p:txBody>
-          <a:bodyPr wrap="square">
-            <a:spAutoFit/>
-          </a:bodyPr>
-          <a:lstStyle/>
-          <a:p>
-            <a:r>
-              <a:rPr sz="900" b="0" i="0">
-                <a:solidFill>
-                  <a:srgbClr val="595959"/>
-                </a:solidFill>
-                <a:latin typeface="Arial"/>
-              </a:rPr>
-              <a:t>5.5 · Build your team's capability with open knowledge products</a:t>
-            </a:r>
-          </a:p>
-        </p:txBody>
-      </p:sp>
-    </p:spTree>
-  </p:cSld>
-  <p:clrMapOvr>
-    <a:masterClrMapping/>
-  </p:clrMapOvr>
-</p:sld>
-</file>
-
-<file path=ppt/slides/slide32.xml><?xml version="1.0" encoding="utf-8"?>
-<p:sld xmlns:a="http://schemas.openxmlformats.org/drawingml/2006/main" xmlns:p="http://schemas.openxmlformats.org/presentationml/2006/main" xmlns:r="http://schemas.openxmlformats.org/officeDocument/2006/relationships">
-  <p:cSld>
-    <p:spTree>
-      <p:nvGrpSpPr>
-        <p:cNvPr id="1" name=""/>
-        <p:cNvGrpSpPr/>
-        <p:nvPr/>
-      </p:nvGrpSpPr>
-      <p:grpSpPr/>
-      <p:sp>
-        <p:nvSpPr>
-          <p:cNvPr id="2" name="Rectangle 1"/>
-          <p:cNvSpPr/>
-          <p:nvPr/>
-        </p:nvSpPr>
-        <p:spPr>
-          <a:xfrm>
-            <a:off x="457200" y="384048"/>
-            <a:ext cx="45720" cy="256032"/>
-          </a:xfrm>
-          <a:prstGeom prst="rect">
-            <a:avLst/>
-          </a:prstGeom>
-          <a:solidFill>
-            <a:srgbClr val="009CD6"/>
-          </a:solidFill>
-          <a:ln>
-            <a:noFill/>
-          </a:ln>
-          <a:effectLst/>
-        </p:spPr>
-        <p:style>
-          <a:lnRef idx="1">
-            <a:schemeClr val="accent1"/>
-          </a:lnRef>
-          <a:fillRef idx="3">
-            <a:schemeClr val="accent1"/>
-          </a:fillRef>
-          <a:effectRef idx="2">
-            <a:schemeClr val="accent1"/>
-          </a:effectRef>
-          <a:fontRef idx="minor">
-            <a:schemeClr val="lt1"/>
-          </a:fontRef>
-        </p:style>
-        <p:txBody>
-          <a:bodyPr rtlCol="0" anchor="ctr"/>
-          <a:lstStyle/>
-          <a:p>
-            <a:pPr algn="ctr"/>
-          </a:p>
-        </p:txBody>
-      </p:sp>
-      <p:sp>
-        <p:nvSpPr>
-          <p:cNvPr id="3" name="TextBox 2"/>
-          <p:cNvSpPr txBox="1"/>
-          <p:nvPr/>
-        </p:nvSpPr>
-        <p:spPr>
-          <a:xfrm>
-            <a:off x="621792" y="274320"/>
-            <a:ext cx="11247120" cy="914400"/>
-          </a:xfrm>
-          <a:prstGeom prst="rect">
-            <a:avLst/>
-          </a:prstGeom>
-          <a:noFill/>
-        </p:spPr>
-        <p:txBody>
-          <a:bodyPr wrap="square">
-            <a:spAutoFit/>
-          </a:bodyPr>
-          <a:lstStyle/>
-          <a:p>
-            <a:r>
-              <a:rPr sz="2800" b="1" i="0">
-                <a:solidFill>
-                  <a:srgbClr val="1A1A1A"/>
-                </a:solidFill>
-                <a:latin typeface="Arial"/>
-              </a:rPr>
-              <a:t>Three layers you draw on rather than build</a:t>
-            </a:r>
-          </a:p>
-        </p:txBody>
-      </p:sp>
-      <p:sp>
-        <p:nvSpPr>
-          <p:cNvPr id="4" name="Oval 3"/>
-          <p:cNvSpPr/>
-          <p:nvPr/>
-        </p:nvSpPr>
-        <p:spPr>
-          <a:xfrm>
-            <a:off x="621792" y="1508760"/>
-            <a:ext cx="310896" cy="310896"/>
-          </a:xfrm>
-          <a:prstGeom prst="ellipse">
-            <a:avLst/>
-          </a:prstGeom>
-          <a:solidFill>
-            <a:srgbClr val="009CD6"/>
-          </a:solidFill>
-          <a:ln>
-            <a:noFill/>
-          </a:ln>
-          <a:effectLst/>
-        </p:spPr>
-        <p:style>
-          <a:lnRef idx="1">
-            <a:schemeClr val="accent1"/>
-          </a:lnRef>
-          <a:fillRef idx="3">
-            <a:schemeClr val="accent1"/>
-          </a:fillRef>
-          <a:effectRef idx="2">
-            <a:schemeClr val="accent1"/>
-          </a:effectRef>
-          <a:fontRef idx="minor">
-            <a:schemeClr val="lt1"/>
-          </a:fontRef>
-        </p:style>
-        <p:txBody>
-          <a:bodyPr rtlCol="0" anchor="ctr" lIns="0" rIns="0" tIns="0" bIns="0" wrap="square"/>
-          <a:lstStyle/>
-          <a:p>
-            <a:pPr algn="ctr"/>
-            <a:r>
-              <a:rPr sz="1300" b="1" i="0">
-                <a:solidFill>
-                  <a:srgbClr val="FFFFFF"/>
-                </a:solidFill>
-                <a:latin typeface="Arial"/>
-              </a:rPr>
-              <a:t>1</a:t>
-            </a:r>
-          </a:p>
-        </p:txBody>
-      </p:sp>
-      <p:sp>
-        <p:nvSpPr>
-          <p:cNvPr id="5" name="TextBox 4"/>
-          <p:cNvSpPr txBox="1"/>
-          <p:nvPr/>
-        </p:nvSpPr>
-        <p:spPr>
-          <a:xfrm>
-            <a:off x="1115568" y="1463040"/>
-            <a:ext cx="10527487" cy="1386839"/>
-          </a:xfrm>
-          <a:prstGeom prst="rect">
-            <a:avLst/>
-          </a:prstGeom>
-          <a:noFill/>
-        </p:spPr>
-        <p:txBody>
-          <a:bodyPr wrap="square">
-            <a:spAutoFit/>
-          </a:bodyPr>
-          <a:lstStyle/>
-          <a:p>
-            <a:pPr>
-              <a:spcAft>
-                <a:spcPts val="300"/>
-              </a:spcAft>
-            </a:pPr>
-            <a:r>
-              <a:rPr sz="1900" b="1" i="0">
-                <a:solidFill>
-                  <a:srgbClr val="1A1A1A"/>
-                </a:solidFill>
-                <a:latin typeface="Arial"/>
-              </a:rPr>
-              <a:t>The published framework</a:t>
-            </a:r>
-          </a:p>
-          <a:p>
-            <a:pPr>
-              <a:spcAft>
-                <a:spcPts val="300"/>
-              </a:spcAft>
-            </a:pPr>
-            <a:r>
-              <a:rPr sz="1550" b="0" i="0">
-                <a:solidFill>
-                  <a:srgbClr val="595959"/>
-                </a:solidFill>
-                <a:latin typeface="Arial"/>
-              </a:rPr>
-              <a:t>What to do — the phases, the principles, the deliverables.</a:t>
-            </a:r>
-          </a:p>
-        </p:txBody>
-      </p:sp>
-      <p:sp>
-        <p:nvSpPr>
-          <p:cNvPr id="6" name="Rectangle 5"/>
-          <p:cNvSpPr/>
-          <p:nvPr/>
-        </p:nvSpPr>
-        <p:spPr>
-          <a:xfrm>
-            <a:off x="621792" y="2854452"/>
-            <a:ext cx="10881360" cy="12700"/>
-          </a:xfrm>
-          <a:prstGeom prst="rect">
-            <a:avLst/>
-          </a:prstGeom>
-          <a:solidFill>
-            <a:srgbClr val="DDECF4"/>
-          </a:solidFill>
-          <a:ln>
-            <a:noFill/>
-          </a:ln>
-          <a:effectLst/>
-        </p:spPr>
-        <p:style>
-          <a:lnRef idx="1">
-            <a:schemeClr val="accent1"/>
-          </a:lnRef>
-          <a:fillRef idx="3">
-            <a:schemeClr val="accent1"/>
-          </a:fillRef>
-          <a:effectRef idx="2">
-            <a:schemeClr val="accent1"/>
-          </a:effectRef>
-          <a:fontRef idx="minor">
-            <a:schemeClr val="lt1"/>
-          </a:fontRef>
-        </p:style>
-        <p:txBody>
-          <a:bodyPr rtlCol="0" anchor="ctr"/>
-          <a:lstStyle/>
-          <a:p>
-            <a:pPr algn="ctr"/>
-          </a:p>
-        </p:txBody>
-      </p:sp>
-      <p:sp>
-        <p:nvSpPr>
-          <p:cNvPr id="7" name="Oval 6"/>
-          <p:cNvSpPr/>
-          <p:nvPr/>
-        </p:nvSpPr>
-        <p:spPr>
-          <a:xfrm>
-            <a:off x="621792" y="2941319"/>
-            <a:ext cx="310896" cy="310896"/>
-          </a:xfrm>
-          <a:prstGeom prst="ellipse">
-            <a:avLst/>
-          </a:prstGeom>
-          <a:solidFill>
-            <a:srgbClr val="009CD6"/>
-          </a:solidFill>
-          <a:ln>
-            <a:noFill/>
-          </a:ln>
-          <a:effectLst/>
-        </p:spPr>
-        <p:style>
-          <a:lnRef idx="1">
-            <a:schemeClr val="accent1"/>
-          </a:lnRef>
-          <a:fillRef idx="3">
-            <a:schemeClr val="accent1"/>
-          </a:fillRef>
-          <a:effectRef idx="2">
-            <a:schemeClr val="accent1"/>
-          </a:effectRef>
-          <a:fontRef idx="minor">
-            <a:schemeClr val="lt1"/>
-          </a:fontRef>
-        </p:style>
-        <p:txBody>
-          <a:bodyPr rtlCol="0" anchor="ctr" lIns="0" rIns="0" tIns="0" bIns="0" wrap="square"/>
-          <a:lstStyle/>
-          <a:p>
-            <a:pPr algn="ctr"/>
-            <a:r>
-              <a:rPr sz="1300" b="1" i="0">
-                <a:solidFill>
-                  <a:srgbClr val="FFFFFF"/>
-                </a:solidFill>
-                <a:latin typeface="Arial"/>
-              </a:rPr>
-              <a:t>2</a:t>
-            </a:r>
-          </a:p>
-        </p:txBody>
-      </p:sp>
-      <p:sp>
-        <p:nvSpPr>
-          <p:cNvPr id="8" name="TextBox 7"/>
-          <p:cNvSpPr txBox="1"/>
-          <p:nvPr/>
-        </p:nvSpPr>
-        <p:spPr>
-          <a:xfrm>
-            <a:off x="1115568" y="2895600"/>
-            <a:ext cx="10527487" cy="1386839"/>
-          </a:xfrm>
-          <a:prstGeom prst="rect">
-            <a:avLst/>
-          </a:prstGeom>
-          <a:noFill/>
-        </p:spPr>
-        <p:txBody>
-          <a:bodyPr wrap="square">
-            <a:spAutoFit/>
-          </a:bodyPr>
-          <a:lstStyle/>
-          <a:p>
-            <a:pPr>
-              <a:spcAft>
-                <a:spcPts val="300"/>
-              </a:spcAft>
-            </a:pPr>
-            <a:r>
-              <a:rPr sz="1900" b="1" i="0">
-                <a:solidFill>
-                  <a:srgbClr val="1A1A1A"/>
-                </a:solidFill>
-                <a:latin typeface="Arial"/>
-              </a:rPr>
-              <a:t>The worked examples and the AI plays</a:t>
-            </a:r>
-          </a:p>
-          <a:p>
-            <a:pPr>
-              <a:spcAft>
-                <a:spcPts val="300"/>
-              </a:spcAft>
-            </a:pPr>
-            <a:r>
-              <a:rPr sz="1550" b="0" i="0">
-                <a:solidFill>
-                  <a:srgbClr val="595959"/>
-                </a:solidFill>
-                <a:latin typeface="Arial"/>
-              </a:rPr>
-              <a:t>How to do it faster — a method turned into a draft in minutes.</a:t>
-            </a:r>
-          </a:p>
-        </p:txBody>
-      </p:sp>
-      <p:sp>
-        <p:nvSpPr>
-          <p:cNvPr id="9" name="Rectangle 8"/>
-          <p:cNvSpPr/>
-          <p:nvPr/>
-        </p:nvSpPr>
-        <p:spPr>
-          <a:xfrm>
-            <a:off x="621792" y="4287011"/>
-            <a:ext cx="10881360" cy="12700"/>
-          </a:xfrm>
-          <a:prstGeom prst="rect">
-            <a:avLst/>
-          </a:prstGeom>
-          <a:solidFill>
-            <a:srgbClr val="DDECF4"/>
-          </a:solidFill>
-          <a:ln>
-            <a:noFill/>
-          </a:ln>
-          <a:effectLst/>
-        </p:spPr>
-        <p:style>
-          <a:lnRef idx="1">
-            <a:schemeClr val="accent1"/>
-          </a:lnRef>
-          <a:fillRef idx="3">
-            <a:schemeClr val="accent1"/>
-          </a:fillRef>
-          <a:effectRef idx="2">
-            <a:schemeClr val="accent1"/>
-          </a:effectRef>
-          <a:fontRef idx="minor">
-            <a:schemeClr val="lt1"/>
-          </a:fontRef>
-        </p:style>
-        <p:txBody>
-          <a:bodyPr rtlCol="0" anchor="ctr"/>
-          <a:lstStyle/>
-          <a:p>
-            <a:pPr algn="ctr"/>
-          </a:p>
-        </p:txBody>
-      </p:sp>
-      <p:sp>
-        <p:nvSpPr>
-          <p:cNvPr id="10" name="Oval 9"/>
-          <p:cNvSpPr/>
-          <p:nvPr/>
-        </p:nvSpPr>
-        <p:spPr>
-          <a:xfrm>
-            <a:off x="621792" y="4373879"/>
-            <a:ext cx="310896" cy="310896"/>
-          </a:xfrm>
-          <a:prstGeom prst="ellipse">
-            <a:avLst/>
-          </a:prstGeom>
-          <a:solidFill>
-            <a:srgbClr val="009CD6"/>
-          </a:solidFill>
-          <a:ln>
-            <a:noFill/>
-          </a:ln>
-          <a:effectLst/>
-        </p:spPr>
-        <p:style>
-          <a:lnRef idx="1">
-            <a:schemeClr val="accent1"/>
-          </a:lnRef>
-          <a:fillRef idx="3">
-            <a:schemeClr val="accent1"/>
-          </a:fillRef>
-          <a:effectRef idx="2">
-            <a:schemeClr val="accent1"/>
-          </a:effectRef>
-          <a:fontRef idx="minor">
-            <a:schemeClr val="lt1"/>
-          </a:fontRef>
-        </p:style>
-        <p:txBody>
-          <a:bodyPr rtlCol="0" anchor="ctr" lIns="0" rIns="0" tIns="0" bIns="0" wrap="square"/>
-          <a:lstStyle/>
-          <a:p>
-            <a:pPr algn="ctr"/>
-            <a:r>
-              <a:rPr sz="1300" b="1" i="0">
-                <a:solidFill>
-                  <a:srgbClr val="FFFFFF"/>
-                </a:solidFill>
-                <a:latin typeface="Arial"/>
-              </a:rPr>
-              <a:t>3</a:t>
-            </a:r>
-          </a:p>
-        </p:txBody>
-      </p:sp>
-      <p:sp>
-        <p:nvSpPr>
-          <p:cNvPr id="11" name="TextBox 10"/>
-          <p:cNvSpPr txBox="1"/>
-          <p:nvPr/>
-        </p:nvSpPr>
-        <p:spPr>
-          <a:xfrm>
-            <a:off x="1115568" y="4328159"/>
-            <a:ext cx="10527487" cy="1386839"/>
-          </a:xfrm>
-          <a:prstGeom prst="rect">
-            <a:avLst/>
-          </a:prstGeom>
-          <a:noFill/>
-        </p:spPr>
-        <p:txBody>
-          <a:bodyPr wrap="square">
-            <a:spAutoFit/>
-          </a:bodyPr>
-          <a:lstStyle/>
-          <a:p>
-            <a:pPr>
-              <a:spcAft>
-                <a:spcPts val="300"/>
-              </a:spcAft>
-            </a:pPr>
-            <a:r>
-              <a:rPr sz="1900" b="1" i="0">
-                <a:solidFill>
-                  <a:srgbClr val="1A1A1A"/>
-                </a:solidFill>
-                <a:latin typeface="Arial"/>
-              </a:rPr>
-              <a:t>The community of countries and partners</a:t>
-            </a:r>
-          </a:p>
-          <a:p>
-            <a:pPr>
-              <a:spcAft>
-                <a:spcPts val="300"/>
-              </a:spcAft>
-            </a:pPr>
-            <a:r>
-              <a:rPr sz="1550" b="0" i="0">
-                <a:solidFill>
-                  <a:srgbClr val="595959"/>
-                </a:solidFill>
-                <a:latin typeface="Arial"/>
-              </a:rPr>
-              <a:t>Who to ask when your team is stuck.</a:t>
-            </a:r>
-          </a:p>
-        </p:txBody>
-      </p:sp>
-      <p:sp>
-        <p:nvSpPr>
-          <p:cNvPr id="12" name="TextBox 11"/>
-          <p:cNvSpPr txBox="1"/>
-          <p:nvPr/>
-        </p:nvSpPr>
-        <p:spPr>
-          <a:xfrm>
-            <a:off x="658368" y="5870448"/>
-            <a:ext cx="10881360" cy="548640"/>
-          </a:xfrm>
-          <a:prstGeom prst="rect">
-            <a:avLst/>
-          </a:prstGeom>
-          <a:noFill/>
-        </p:spPr>
-        <p:txBody>
-          <a:bodyPr wrap="square">
-            <a:spAutoFit/>
-          </a:bodyPr>
-          <a:lstStyle/>
-          <a:p>
-            <a:r>
-              <a:rPr sz="1550" b="1" i="0">
-                <a:solidFill>
-                  <a:srgbClr val="006E96"/>
-                </a:solidFill>
-                <a:latin typeface="Arial"/>
-              </a:rPr>
-              <a:t>You are not equipping your team alone. You are connecting them to a network.</a:t>
-            </a:r>
-          </a:p>
-        </p:txBody>
-      </p:sp>
-      <p:sp>
-        <p:nvSpPr>
-          <p:cNvPr id="13" name="TextBox 12"/>
-          <p:cNvSpPr txBox="1"/>
-          <p:nvPr/>
-        </p:nvSpPr>
-        <p:spPr>
-          <a:xfrm>
-            <a:off x="457200" y="6473952"/>
-            <a:ext cx="7772400" cy="292608"/>
-          </a:xfrm>
-          <a:prstGeom prst="rect">
-            <a:avLst/>
-          </a:prstGeom>
-          <a:noFill/>
-        </p:spPr>
-        <p:txBody>
-          <a:bodyPr wrap="square">
-            <a:spAutoFit/>
-          </a:bodyPr>
-          <a:lstStyle/>
-          <a:p>
-            <a:r>
-              <a:rPr sz="900" b="0" i="0">
-                <a:solidFill>
-                  <a:srgbClr val="595959"/>
-                </a:solidFill>
-                <a:latin typeface="Arial"/>
-              </a:rPr>
-              <a:t>5.5 · Build your team's capability with open knowledge products</a:t>
-            </a:r>
-          </a:p>
-        </p:txBody>
-      </p:sp>
-    </p:spTree>
-  </p:cSld>
-  <p:clrMapOvr>
-    <a:masterClrMapping/>
-  </p:clrMapOvr>
-</p:sld>
-</file>
-
-<file path=ppt/slides/slide33.xml><?xml version="1.0" encoding="utf-8"?>
-<p:sld xmlns:a="http://schemas.openxmlformats.org/drawingml/2006/main" xmlns:p="http://schemas.openxmlformats.org/presentationml/2006/main" xmlns:r="http://schemas.openxmlformats.org/officeDocument/2006/relationships">
-  <p:cSld>
-    <p:spTree>
-      <p:nvGrpSpPr>
-        <p:cNvPr id="1" name=""/>
-        <p:cNvGrpSpPr/>
-        <p:nvPr/>
-      </p:nvGrpSpPr>
-      <p:grpSpPr/>
-      <p:sp>
-        <p:nvSpPr>
-          <p:cNvPr id="2" name="Rectangle 1"/>
-          <p:cNvSpPr/>
-          <p:nvPr/>
-        </p:nvSpPr>
-        <p:spPr>
-          <a:xfrm>
-            <a:off x="457200" y="384048"/>
-            <a:ext cx="45720" cy="256032"/>
-          </a:xfrm>
-          <a:prstGeom prst="rect">
-            <a:avLst/>
-          </a:prstGeom>
-          <a:solidFill>
-            <a:srgbClr val="009CD6"/>
-          </a:solidFill>
-          <a:ln>
-            <a:noFill/>
-          </a:ln>
-          <a:effectLst/>
-        </p:spPr>
-        <p:style>
-          <a:lnRef idx="1">
-            <a:schemeClr val="accent1"/>
-          </a:lnRef>
-          <a:fillRef idx="3">
-            <a:schemeClr val="accent1"/>
-          </a:fillRef>
-          <a:effectRef idx="2">
-            <a:schemeClr val="accent1"/>
-          </a:effectRef>
-          <a:fontRef idx="minor">
-            <a:schemeClr val="lt1"/>
-          </a:fontRef>
-        </p:style>
-        <p:txBody>
-          <a:bodyPr rtlCol="0" anchor="ctr"/>
-          <a:lstStyle/>
-          <a:p>
-            <a:pPr algn="ctr"/>
-          </a:p>
-        </p:txBody>
-      </p:sp>
-      <p:sp>
-        <p:nvSpPr>
-          <p:cNvPr id="3" name="TextBox 2"/>
-          <p:cNvSpPr txBox="1"/>
-          <p:nvPr/>
-        </p:nvSpPr>
-        <p:spPr>
-          <a:xfrm>
-            <a:off x="621792" y="274320"/>
-            <a:ext cx="11247120" cy="914400"/>
-          </a:xfrm>
-          <a:prstGeom prst="rect">
-            <a:avLst/>
-          </a:prstGeom>
-          <a:noFill/>
-        </p:spPr>
-        <p:txBody>
-          <a:bodyPr wrap="square">
-            <a:spAutoFit/>
-          </a:bodyPr>
-          <a:lstStyle/>
-          <a:p>
-            <a:r>
-              <a:rPr sz="2800" b="1" i="0">
-                <a:solidFill>
-                  <a:srgbClr val="1A1A1A"/>
-                </a:solidFill>
-                <a:latin typeface="Arial"/>
-              </a:rPr>
-              <a:t>What you actually need to fund is time, not invention</a:t>
-            </a:r>
-          </a:p>
-        </p:txBody>
-      </p:sp>
-      <p:sp>
-        <p:nvSpPr>
-          <p:cNvPr id="4" name="TextBox 3"/>
-          <p:cNvSpPr txBox="1"/>
-          <p:nvPr/>
-        </p:nvSpPr>
-        <p:spPr>
-          <a:xfrm>
-            <a:off x="658368" y="1600200"/>
-            <a:ext cx="10881360" cy="2194560"/>
-          </a:xfrm>
-          <a:prstGeom prst="rect">
-            <a:avLst/>
-          </a:prstGeom>
-          <a:noFill/>
-        </p:spPr>
-        <p:txBody>
-          <a:bodyPr wrap="square">
-            <a:spAutoFit/>
-          </a:bodyPr>
-          <a:lstStyle/>
-          <a:p>
-            <a:pPr>
-              <a:spcAft>
-                <a:spcPts val="1200"/>
-              </a:spcAft>
-            </a:pPr>
-            <a:r>
-              <a:rPr sz="2000" b="0" i="0">
-                <a:solidFill>
-                  <a:srgbClr val="1A1A1A"/>
-                </a:solidFill>
-                <a:latin typeface="Arial"/>
-              </a:rPr>
-              <a:t>Not the invention of a method — that exists. You fund a small team given the time to learn it and apply it to your country, and access to the materials and the community.</a:t>
-            </a:r>
-          </a:p>
-          <a:p>
-            <a:pPr>
-              <a:spcAft>
-                <a:spcPts val="1200"/>
-              </a:spcAft>
-            </a:pPr>
-            <a:r>
-              <a:rPr sz="2000" b="0" i="0">
-                <a:solidFill>
-                  <a:srgbClr val="1A1A1A"/>
-                </a:solidFill>
-                <a:latin typeface="Arial"/>
-              </a:rPr>
-              <a:t>The expensive thing — decades of accumulated knowledge about what works in public-sector architecture — you get for the cost of learning it, not the cost of discovering it.</a:t>
-            </a:r>
-          </a:p>
-        </p:txBody>
-      </p:sp>
-      <p:sp>
-        <p:nvSpPr>
-          <p:cNvPr id="5" name="Rounded Rectangle 4"/>
-          <p:cNvSpPr/>
-          <p:nvPr/>
-        </p:nvSpPr>
-        <p:spPr>
-          <a:xfrm>
-            <a:off x="658368" y="3977639"/>
-            <a:ext cx="10881360" cy="1325880"/>
-          </a:xfrm>
-          <a:prstGeom prst="roundRect">
-            <a:avLst>
-              <a:gd name="adj" fmla="val 4500"/>
-            </a:avLst>
-          </a:prstGeom>
-          <a:solidFill>
-            <a:srgbClr val="E5F5FB"/>
-          </a:solidFill>
-          <a:ln>
-            <a:noFill/>
-          </a:ln>
-          <a:effectLst/>
-        </p:spPr>
-        <p:style>
-          <a:lnRef idx="1">
-            <a:schemeClr val="accent1"/>
-          </a:lnRef>
-          <a:fillRef idx="3">
-            <a:schemeClr val="accent1"/>
-          </a:fillRef>
-          <a:effectRef idx="2">
-            <a:schemeClr val="accent1"/>
-          </a:effectRef>
-          <a:fontRef idx="minor">
-            <a:schemeClr val="lt1"/>
-          </a:fontRef>
-        </p:style>
-        <p:txBody>
-          <a:bodyPr rtlCol="0" anchor="ctr"/>
-          <a:lstStyle/>
-          <a:p>
-            <a:pPr algn="ctr"/>
-          </a:p>
-        </p:txBody>
-      </p:sp>
-      <p:sp>
-        <p:nvSpPr>
-          <p:cNvPr id="6" name="TextBox 5"/>
-          <p:cNvSpPr txBox="1"/>
-          <p:nvPr/>
-        </p:nvSpPr>
-        <p:spPr>
-          <a:xfrm>
-            <a:off x="859536" y="4169663"/>
-            <a:ext cx="10479024" cy="1051560"/>
-          </a:xfrm>
-          <a:prstGeom prst="rect">
-            <a:avLst/>
-          </a:prstGeom>
-          <a:noFill/>
-        </p:spPr>
-        <p:txBody>
-          <a:bodyPr wrap="square">
-            <a:spAutoFit/>
-          </a:bodyPr>
-          <a:lstStyle/>
-          <a:p>
-            <a:pPr>
-              <a:spcAft>
-                <a:spcPts val="700"/>
-              </a:spcAft>
-            </a:pPr>
-            <a:r>
-              <a:rPr sz="2300" b="1" i="0">
-                <a:solidFill>
-                  <a:srgbClr val="006E96"/>
-                </a:solidFill>
-                <a:latin typeface="Arial"/>
-              </a:rPr>
-              <a:t>Fund a team to apply a proven method, not consultants to invent one.</a:t>
-            </a:r>
-          </a:p>
-        </p:txBody>
-      </p:sp>
-      <p:sp>
-        <p:nvSpPr>
-          <p:cNvPr id="7" name="TextBox 6"/>
-          <p:cNvSpPr txBox="1"/>
-          <p:nvPr/>
-        </p:nvSpPr>
-        <p:spPr>
-          <a:xfrm>
-            <a:off x="457200" y="6473952"/>
-            <a:ext cx="7772400" cy="292608"/>
-          </a:xfrm>
-          <a:prstGeom prst="rect">
-            <a:avLst/>
-          </a:prstGeom>
-          <a:noFill/>
-        </p:spPr>
-        <p:txBody>
-          <a:bodyPr wrap="square">
-            <a:spAutoFit/>
-          </a:bodyPr>
-          <a:lstStyle/>
-          <a:p>
-            <a:r>
-              <a:rPr sz="900" b="0" i="0">
-                <a:solidFill>
-                  <a:srgbClr val="595959"/>
-                </a:solidFill>
-                <a:latin typeface="Arial"/>
-              </a:rPr>
-              <a:t>5.5 · Build your team's capability with open knowledge products</a:t>
-            </a:r>
-          </a:p>
-        </p:txBody>
-      </p:sp>
-    </p:spTree>
-  </p:cSld>
-  <p:clrMapOvr>
-    <a:masterClrMapping/>
-  </p:clrMapOvr>
-</p:sld>
-</file>
-
 <file path=ppt/slides/slide34.xml><?xml version="1.0" encoding="utf-8"?>
 <p:sld xmlns:a="http://schemas.openxmlformats.org/drawingml/2006/main" xmlns:p="http://schemas.openxmlformats.org/presentationml/2006/main" xmlns:r="http://schemas.openxmlformats.org/officeDocument/2006/relationships">
   <p:cSld>
@@ -13644,58 +11608,14 @@
       <p:grpSpPr/>
       <p:sp>
         <p:nvSpPr>
-          <p:cNvPr id="2" name="Rectangle 1"/>
-          <p:cNvSpPr/>
-          <p:nvPr/>
-        </p:nvSpPr>
-        <p:spPr>
-          <a:xfrm>
-            <a:off x="457200" y="384048"/>
-            <a:ext cx="45720" cy="256032"/>
-          </a:xfrm>
-          <a:prstGeom prst="rect">
-            <a:avLst/>
-          </a:prstGeom>
-          <a:solidFill>
-            <a:srgbClr val="009CD6"/>
-          </a:solidFill>
-          <a:ln>
-            <a:noFill/>
-          </a:ln>
-          <a:effectLst/>
-        </p:spPr>
-        <p:style>
-          <a:lnRef idx="1">
-            <a:schemeClr val="accent1"/>
-          </a:lnRef>
-          <a:fillRef idx="3">
-            <a:schemeClr val="accent1"/>
-          </a:fillRef>
-          <a:effectRef idx="2">
-            <a:schemeClr val="accent1"/>
-          </a:effectRef>
-          <a:fontRef idx="minor">
-            <a:schemeClr val="lt1"/>
-          </a:fontRef>
-        </p:style>
-        <p:txBody>
-          <a:bodyPr rtlCol="0" anchor="ctr"/>
-          <a:lstStyle/>
-          <a:p>
-            <a:pPr algn="ctr"/>
-          </a:p>
-        </p:txBody>
-      </p:sp>
-      <p:sp>
-        <p:nvSpPr>
-          <p:cNvPr id="3" name="TextBox 2"/>
+          <p:cNvPr id="2" name="TextBox 1"/>
           <p:cNvSpPr txBox="1"/>
           <p:nvPr/>
         </p:nvSpPr>
         <p:spPr>
           <a:xfrm>
-            <a:off x="621792" y="274320"/>
-            <a:ext cx="11247120" cy="914400"/>
+            <a:off x="822960" y="822960"/>
+            <a:ext cx="7315200" cy="457200"/>
           </a:xfrm>
           <a:prstGeom prst="rect">
             <a:avLst/>
@@ -13709,27 +11629,95 @@
           <a:lstStyle/>
           <a:p>
             <a:r>
-              <a:rPr sz="2800" b="1" i="0">
+              <a:rPr sz="1200" b="1" i="0">
+                <a:solidFill>
+                  <a:srgbClr val="595959"/>
+                </a:solidFill>
+                <a:latin typeface="Arial"/>
+              </a:rPr>
+              <a:t>KP1 · MODULE 5 · VIDEO 5.5</a:t>
+            </a:r>
+          </a:p>
+        </p:txBody>
+      </p:sp>
+      <p:sp>
+        <p:nvSpPr>
+          <p:cNvPr id="3" name="TextBox 2"/>
+          <p:cNvSpPr txBox="1"/>
+          <p:nvPr/>
+        </p:nvSpPr>
+        <p:spPr>
+          <a:xfrm>
+            <a:off x="822960" y="1828800"/>
+            <a:ext cx="2011680" cy="1097280"/>
+          </a:xfrm>
+          <a:prstGeom prst="rect">
+            <a:avLst/>
+          </a:prstGeom>
+          <a:noFill/>
+        </p:spPr>
+        <p:txBody>
+          <a:bodyPr wrap="square">
+            <a:spAutoFit/>
+          </a:bodyPr>
+          <a:lstStyle/>
+          <a:p>
+            <a:r>
+              <a:rPr sz="6000" b="1" i="0">
+                <a:solidFill>
+                  <a:srgbClr val="009CD6"/>
+                </a:solidFill>
+                <a:latin typeface="Arial"/>
+              </a:rPr>
+              <a:t>5.5</a:t>
+            </a:r>
+          </a:p>
+        </p:txBody>
+      </p:sp>
+      <p:sp>
+        <p:nvSpPr>
+          <p:cNvPr id="4" name="TextBox 3"/>
+          <p:cNvSpPr txBox="1"/>
+          <p:nvPr/>
+        </p:nvSpPr>
+        <p:spPr>
+          <a:xfrm>
+            <a:off x="822960" y="2880360"/>
+            <a:ext cx="9601200" cy="1371600"/>
+          </a:xfrm>
+          <a:prstGeom prst="rect">
+            <a:avLst/>
+          </a:prstGeom>
+          <a:noFill/>
+        </p:spPr>
+        <p:txBody>
+          <a:bodyPr wrap="square">
+            <a:spAutoFit/>
+          </a:bodyPr>
+          <a:lstStyle/>
+          <a:p>
+            <a:r>
+              <a:rPr sz="3400" b="1" i="0">
                 <a:solidFill>
                   <a:srgbClr val="1A1A1A"/>
                 </a:solidFill>
                 <a:latin typeface="Arial"/>
               </a:rPr>
-              <a:t>Build the capability in your own people</a:t>
-            </a:r>
-          </a:p>
-        </p:txBody>
-      </p:sp>
-      <p:sp>
-        <p:nvSpPr>
-          <p:cNvPr id="4" name="TextBox 3"/>
+              <a:t>Build your team's capability with open knowledge products</a:t>
+            </a:r>
+          </a:p>
+        </p:txBody>
+      </p:sp>
+      <p:sp>
+        <p:nvSpPr>
+          <p:cNvPr id="5" name="TextBox 4"/>
           <p:cNvSpPr txBox="1"/>
           <p:nvPr/>
         </p:nvSpPr>
         <p:spPr>
           <a:xfrm>
-            <a:off x="658368" y="1600200"/>
-            <a:ext cx="10881360" cy="2194560"/>
+            <a:off x="822960" y="4343400"/>
+            <a:ext cx="9875520" cy="1554480"/>
           </a:xfrm>
           <a:prstGeom prst="rect">
             <a:avLst/>
@@ -13742,154 +11730,48 @@
           </a:bodyPr>
           <a:lstStyle/>
           <a:p>
-            <a:pPr>
-              <a:spcAft>
-                <a:spcPts val="1200"/>
-              </a:spcAft>
-            </a:pPr>
-            <a:r>
-              <a:rPr sz="2000" b="0" i="0">
-                <a:solidFill>
-                  <a:srgbClr val="1A1A1A"/>
-                </a:solidFill>
-                <a:latin typeface="Arial"/>
-              </a:rPr>
-              <a:t>Open knowledge products let you build the capability inside your own institutions — architects who learn the method, apply it, and stay — instead of expertise that walks out of the door when a contract ends.</a:t>
-            </a:r>
-          </a:p>
-          <a:p>
-            <a:pPr>
-              <a:spcAft>
-                <a:spcPts val="1200"/>
-              </a:spcAft>
-            </a:pPr>
-            <a:r>
-              <a:rPr sz="2000" b="0" i="0">
-                <a:solidFill>
-                  <a:srgbClr val="1A1A1A"/>
-                </a:solidFill>
-                <a:latin typeface="Arial"/>
-              </a:rPr>
-              <a:t>A strategist's quiet goal in all of this is a national capability that outlasts any single contract or consultant.</a:t>
-            </a:r>
-          </a:p>
-        </p:txBody>
-      </p:sp>
-      <p:sp>
-        <p:nvSpPr>
-          <p:cNvPr id="5" name="Rounded Rectangle 4"/>
-          <p:cNvSpPr/>
-          <p:nvPr/>
-        </p:nvSpPr>
-        <p:spPr>
-          <a:xfrm>
-            <a:off x="658368" y="3977639"/>
-            <a:ext cx="10881360" cy="1325880"/>
-          </a:xfrm>
-          <a:prstGeom prst="roundRect">
-            <a:avLst>
-              <a:gd name="adj" fmla="val 4500"/>
-            </a:avLst>
-          </a:prstGeom>
-          <a:solidFill>
-            <a:srgbClr val="E5F5FB"/>
-          </a:solidFill>
-          <a:ln>
-            <a:noFill/>
-          </a:ln>
-          <a:effectLst/>
-        </p:spPr>
-        <p:style>
-          <a:lnRef idx="1">
-            <a:schemeClr val="accent1"/>
-          </a:lnRef>
-          <a:fillRef idx="3">
-            <a:schemeClr val="accent1"/>
-          </a:fillRef>
-          <a:effectRef idx="2">
-            <a:schemeClr val="accent1"/>
-          </a:effectRef>
-          <a:fontRef idx="minor">
-            <a:schemeClr val="lt1"/>
-          </a:fontRef>
-        </p:style>
-        <p:txBody>
-          <a:bodyPr rtlCol="0" anchor="ctr"/>
-          <a:lstStyle/>
-          <a:p>
-            <a:pPr algn="ctr"/>
-          </a:p>
-        </p:txBody>
-      </p:sp>
-      <p:sp>
-        <p:nvSpPr>
-          <p:cNvPr id="6" name="TextBox 5"/>
-          <p:cNvSpPr txBox="1"/>
-          <p:nvPr/>
-        </p:nvSpPr>
-        <p:spPr>
-          <a:xfrm>
-            <a:off x="859536" y="4169663"/>
-            <a:ext cx="10479024" cy="1051560"/>
-          </a:xfrm>
-          <a:prstGeom prst="rect">
-            <a:avLst/>
-          </a:prstGeom>
-          <a:noFill/>
-        </p:spPr>
-        <p:txBody>
-          <a:bodyPr wrap="square">
-            <a:spAutoFit/>
-          </a:bodyPr>
-          <a:lstStyle/>
-          <a:p>
-            <a:pPr>
-              <a:spcAft>
-                <a:spcPts val="700"/>
-              </a:spcAft>
-            </a:pPr>
-            <a:r>
-              <a:rPr sz="2300" b="1" i="0">
-                <a:solidFill>
-                  <a:srgbClr val="006E96"/>
-                </a:solidFill>
-                <a:latin typeface="Arial"/>
-              </a:rPr>
-              <a:t>Open knowledge products are how you build it in your own people.</a:t>
-            </a:r>
-          </a:p>
-        </p:txBody>
-      </p:sp>
-      <p:sp>
-        <p:nvSpPr>
-          <p:cNvPr id="7" name="TextBox 6"/>
-          <p:cNvSpPr txBox="1"/>
-          <p:nvPr/>
-        </p:nvSpPr>
-        <p:spPr>
-          <a:xfrm>
-            <a:off x="457200" y="6473952"/>
-            <a:ext cx="7772400" cy="292608"/>
-          </a:xfrm>
-          <a:prstGeom prst="rect">
-            <a:avLst/>
-          </a:prstGeom>
-          <a:noFill/>
-        </p:spPr>
-        <p:txBody>
-          <a:bodyPr wrap="square">
-            <a:spAutoFit/>
-          </a:bodyPr>
-          <a:lstStyle/>
-          <a:p>
-            <a:r>
-              <a:rPr sz="900" b="0" i="0">
+            <a:r>
+              <a:rPr sz="1700" b="0" i="1">
                 <a:solidFill>
                   <a:srgbClr val="595959"/>
                 </a:solidFill>
                 <a:latin typeface="Arial"/>
               </a:rPr>
-              <a:t>5.5 · Build your team's capability with open knowledge products</a:t>
+              <a:t>You don't have to train your team from scratch — open knowledge products, a shared framework, and a community of practising countries mean your people can learn the method from materials that already exist, freeing your budget for the work itself.</a:t>
+            </a:r>
+          </a:p>
+        </p:txBody>
+      </p:sp>
+      <p:sp>
+        <p:nvSpPr>
+          <p:cNvPr id="6" name="TextBox 5"/>
+          <p:cNvSpPr txBox="1"/>
+          <p:nvPr/>
+        </p:nvSpPr>
+        <p:spPr>
+          <a:xfrm>
+            <a:off x="822960" y="5989320"/>
+            <a:ext cx="7315200" cy="365760"/>
+          </a:xfrm>
+          <a:prstGeom prst="rect">
+            <a:avLst/>
+          </a:prstGeom>
+          <a:noFill/>
+        </p:spPr>
+        <p:txBody>
+          <a:bodyPr wrap="square">
+            <a:spAutoFit/>
+          </a:bodyPr>
+          <a:lstStyle/>
+          <a:p>
+            <a:r>
+              <a:rPr sz="1200" b="0" i="0">
+                <a:solidFill>
+                  <a:srgbClr val="595959"/>
+                </a:solidFill>
+                <a:latin typeface="Arial"/>
+              </a:rPr>
+              <a:t>~4 minutes · standalone video · voice-over on text slides</a:t>
             </a:r>
           </a:p>
         </p:txBody>
@@ -13920,6 +11802,1602 @@
         </p:nvSpPr>
         <p:spPr>
           <a:xfrm>
+            <a:off x="1005840" y="1325880"/>
+            <a:ext cx="5486400" cy="365760"/>
+          </a:xfrm>
+          <a:prstGeom prst="rect">
+            <a:avLst/>
+          </a:prstGeom>
+          <a:noFill/>
+        </p:spPr>
+        <p:txBody>
+          <a:bodyPr wrap="square">
+            <a:spAutoFit/>
+          </a:bodyPr>
+          <a:lstStyle/>
+          <a:p>
+            <a:r>
+              <a:rPr sz="1200" b="1" i="0">
+                <a:solidFill>
+                  <a:srgbClr val="006E96"/>
+                </a:solidFill>
+                <a:latin typeface="Arial"/>
+              </a:rPr>
+              <a:t>WHERE WE START</a:t>
+            </a:r>
+          </a:p>
+        </p:txBody>
+      </p:sp>
+      <p:sp>
+        <p:nvSpPr>
+          <p:cNvPr id="3" name="TextBox 2"/>
+          <p:cNvSpPr txBox="1"/>
+          <p:nvPr/>
+        </p:nvSpPr>
+        <p:spPr>
+          <a:xfrm>
+            <a:off x="1005840" y="1783080"/>
+            <a:ext cx="10149840" cy="1737360"/>
+          </a:xfrm>
+          <a:prstGeom prst="rect">
+            <a:avLst/>
+          </a:prstGeom>
+          <a:noFill/>
+        </p:spPr>
+        <p:txBody>
+          <a:bodyPr wrap="square">
+            <a:spAutoFit/>
+          </a:bodyPr>
+          <a:lstStyle/>
+          <a:p>
+            <a:r>
+              <a:rPr sz="3000" b="1" i="0">
+                <a:solidFill>
+                  <a:srgbClr val="1A1A1A"/>
+                </a:solidFill>
+                <a:latin typeface="Arial"/>
+              </a:rPr>
+              <a:t>Do we have the people — and can we afford to train them?</a:t>
+            </a:r>
+          </a:p>
+        </p:txBody>
+      </p:sp>
+      <p:sp>
+        <p:nvSpPr>
+          <p:cNvPr id="4" name="TextBox 3"/>
+          <p:cNvSpPr txBox="1"/>
+          <p:nvPr/>
+        </p:nvSpPr>
+        <p:spPr>
+          <a:xfrm>
+            <a:off x="1005840" y="3611880"/>
+            <a:ext cx="10149840" cy="2377440"/>
+          </a:xfrm>
+          <a:prstGeom prst="rect">
+            <a:avLst/>
+          </a:prstGeom>
+          <a:noFill/>
+        </p:spPr>
+        <p:txBody>
+          <a:bodyPr wrap="square">
+            <a:spAutoFit/>
+          </a:bodyPr>
+          <a:lstStyle/>
+          <a:p>
+            <a:pPr>
+              <a:spcAft>
+                <a:spcPts val="800"/>
+              </a:spcAft>
+            </a:pPr>
+            <a:r>
+              <a:rPr sz="1700" b="0" i="0">
+                <a:solidFill>
+                  <a:srgbClr val="595959"/>
+                </a:solidFill>
+                <a:latin typeface="Arial"/>
+              </a:rPr>
+              <a:t>You do not have to build the knowledge from scratch.</a:t>
+            </a:r>
+          </a:p>
+          <a:p>
+            <a:pPr>
+              <a:spcAft>
+                <a:spcPts val="800"/>
+              </a:spcAft>
+            </a:pPr>
+            <a:r>
+              <a:rPr sz="1700" b="0" i="0">
+                <a:solidFill>
+                  <a:srgbClr val="595959"/>
+                </a:solidFill>
+                <a:latin typeface="Arial"/>
+              </a:rPr>
+              <a:t>The method, the framework and the training materials already exist as open knowledge products.</a:t>
+            </a:r>
+          </a:p>
+        </p:txBody>
+      </p:sp>
+      <p:sp>
+        <p:nvSpPr>
+          <p:cNvPr id="5" name="TextBox 4"/>
+          <p:cNvSpPr txBox="1"/>
+          <p:nvPr/>
+        </p:nvSpPr>
+        <p:spPr>
+          <a:xfrm>
+            <a:off x="457200" y="6473952"/>
+            <a:ext cx="7772400" cy="292608"/>
+          </a:xfrm>
+          <a:prstGeom prst="rect">
+            <a:avLst/>
+          </a:prstGeom>
+          <a:noFill/>
+        </p:spPr>
+        <p:txBody>
+          <a:bodyPr wrap="square">
+            <a:spAutoFit/>
+          </a:bodyPr>
+          <a:lstStyle/>
+          <a:p>
+            <a:r>
+              <a:rPr sz="900" b="0" i="0">
+                <a:solidFill>
+                  <a:srgbClr val="595959"/>
+                </a:solidFill>
+                <a:latin typeface="Arial"/>
+              </a:rPr>
+              <a:t>5.5 · Build your team's capability with open knowledge products</a:t>
+            </a:r>
+          </a:p>
+        </p:txBody>
+      </p:sp>
+      <p:sp>
+        <p:nvSpPr>
+          <p:cNvPr id="6" name="TextBox 5"/>
+          <p:cNvSpPr txBox="1"/>
+          <p:nvPr/>
+        </p:nvSpPr>
+        <p:spPr>
+          <a:xfrm>
+            <a:off x="10058400" y="6473952"/>
+            <a:ext cx="1673352" cy="292608"/>
+          </a:xfrm>
+          <a:prstGeom prst="rect">
+            <a:avLst/>
+          </a:prstGeom>
+          <a:noFill/>
+        </p:spPr>
+        <p:txBody>
+          <a:bodyPr wrap="square">
+            <a:spAutoFit/>
+          </a:bodyPr>
+          <a:lstStyle/>
+          <a:p>
+            <a:pPr algn="r"/>
+            <a:r>
+              <a:rPr sz="900" b="0" i="0">
+                <a:solidFill>
+                  <a:srgbClr val="595959"/>
+                </a:solidFill>
+                <a:latin typeface="Arial"/>
+              </a:rPr>
+              <a:t>www.itu.int</a:t>
+            </a:r>
+          </a:p>
+        </p:txBody>
+      </p:sp>
+    </p:spTree>
+  </p:cSld>
+  <p:clrMapOvr>
+    <a:masterClrMapping/>
+  </p:clrMapOvr>
+</p:sld>
+</file>
+
+<file path=ppt/slides/slide36.xml><?xml version="1.0" encoding="utf-8"?>
+<p:sld xmlns:a="http://schemas.openxmlformats.org/drawingml/2006/main" xmlns:p="http://schemas.openxmlformats.org/presentationml/2006/main" xmlns:r="http://schemas.openxmlformats.org/officeDocument/2006/relationships">
+  <p:cSld>
+    <p:spTree>
+      <p:nvGrpSpPr>
+        <p:cNvPr id="1" name=""/>
+        <p:cNvGrpSpPr/>
+        <p:nvPr/>
+      </p:nvGrpSpPr>
+      <p:grpSpPr/>
+      <p:sp>
+        <p:nvSpPr>
+          <p:cNvPr id="2" name="Rectangle 1"/>
+          <p:cNvSpPr/>
+          <p:nvPr/>
+        </p:nvSpPr>
+        <p:spPr>
+          <a:xfrm>
+            <a:off x="457200" y="384048"/>
+            <a:ext cx="45720" cy="256032"/>
+          </a:xfrm>
+          <a:prstGeom prst="rect">
+            <a:avLst/>
+          </a:prstGeom>
+          <a:solidFill>
+            <a:srgbClr val="009CD6"/>
+          </a:solidFill>
+          <a:ln>
+            <a:noFill/>
+          </a:ln>
+          <a:effectLst/>
+        </p:spPr>
+        <p:style>
+          <a:lnRef idx="1">
+            <a:schemeClr val="accent1"/>
+          </a:lnRef>
+          <a:fillRef idx="3">
+            <a:schemeClr val="accent1"/>
+          </a:fillRef>
+          <a:effectRef idx="2">
+            <a:schemeClr val="accent1"/>
+          </a:effectRef>
+          <a:fontRef idx="minor">
+            <a:schemeClr val="lt1"/>
+          </a:fontRef>
+        </p:style>
+        <p:txBody>
+          <a:bodyPr rtlCol="0" anchor="ctr"/>
+          <a:lstStyle/>
+          <a:p>
+            <a:pPr algn="ctr"/>
+          </a:p>
+        </p:txBody>
+      </p:sp>
+      <p:sp>
+        <p:nvSpPr>
+          <p:cNvPr id="3" name="TextBox 2"/>
+          <p:cNvSpPr txBox="1"/>
+          <p:nvPr/>
+        </p:nvSpPr>
+        <p:spPr>
+          <a:xfrm>
+            <a:off x="621792" y="274320"/>
+            <a:ext cx="11247120" cy="914400"/>
+          </a:xfrm>
+          <a:prstGeom prst="rect">
+            <a:avLst/>
+          </a:prstGeom>
+          <a:noFill/>
+        </p:spPr>
+        <p:txBody>
+          <a:bodyPr wrap="square">
+            <a:spAutoFit/>
+          </a:bodyPr>
+          <a:lstStyle/>
+          <a:p>
+            <a:r>
+              <a:rPr sz="2800" b="1" i="0">
+                <a:solidFill>
+                  <a:srgbClr val="1A1A1A"/>
+                </a:solidFill>
+                <a:latin typeface="Arial"/>
+              </a:rPr>
+              <a:t>The method is not locked in a consultant's head</a:t>
+            </a:r>
+          </a:p>
+        </p:txBody>
+      </p:sp>
+      <p:sp>
+        <p:nvSpPr>
+          <p:cNvPr id="4" name="TextBox 3"/>
+          <p:cNvSpPr txBox="1"/>
+          <p:nvPr/>
+        </p:nvSpPr>
+        <p:spPr>
+          <a:xfrm>
+            <a:off x="658368" y="1600200"/>
+            <a:ext cx="10881360" cy="2194560"/>
+          </a:xfrm>
+          <a:prstGeom prst="rect">
+            <a:avLst/>
+          </a:prstGeom>
+          <a:noFill/>
+        </p:spPr>
+        <p:txBody>
+          <a:bodyPr wrap="square">
+            <a:spAutoFit/>
+          </a:bodyPr>
+          <a:lstStyle/>
+          <a:p>
+            <a:pPr>
+              <a:spcAft>
+                <a:spcPts val="1200"/>
+              </a:spcAft>
+            </a:pPr>
+            <a:r>
+              <a:rPr sz="2000" b="0" i="0">
+                <a:solidFill>
+                  <a:srgbClr val="1A1A1A"/>
+                </a:solidFill>
+                <a:latin typeface="Arial"/>
+              </a:rPr>
+              <a:t>The reference architecture is published. The building-block specifications are open. The knowledge products — videos, written guides, worked examples — are made to teach a practising architect the method step by step.</a:t>
+            </a:r>
+          </a:p>
+          <a:p>
+            <a:pPr>
+              <a:spcAft>
+                <a:spcPts val="1200"/>
+              </a:spcAft>
+            </a:pPr>
+            <a:r>
+              <a:rPr sz="2000" b="0" i="0">
+                <a:solidFill>
+                  <a:srgbClr val="1A1A1A"/>
+                </a:solidFill>
+                <a:latin typeface="Arial"/>
+              </a:rPr>
+              <a:t>Your team does not start from a blank page. They start from a documented method that other countries are already using.</a:t>
+            </a:r>
+          </a:p>
+        </p:txBody>
+      </p:sp>
+      <p:sp>
+        <p:nvSpPr>
+          <p:cNvPr id="5" name="Rounded Rectangle 4"/>
+          <p:cNvSpPr/>
+          <p:nvPr/>
+        </p:nvSpPr>
+        <p:spPr>
+          <a:xfrm>
+            <a:off x="658368" y="3977639"/>
+            <a:ext cx="10881360" cy="1325880"/>
+          </a:xfrm>
+          <a:prstGeom prst="roundRect">
+            <a:avLst>
+              <a:gd name="adj" fmla="val 4500"/>
+            </a:avLst>
+          </a:prstGeom>
+          <a:solidFill>
+            <a:srgbClr val="E5F5FB"/>
+          </a:solidFill>
+          <a:ln>
+            <a:noFill/>
+          </a:ln>
+          <a:effectLst/>
+        </p:spPr>
+        <p:style>
+          <a:lnRef idx="1">
+            <a:schemeClr val="accent1"/>
+          </a:lnRef>
+          <a:fillRef idx="3">
+            <a:schemeClr val="accent1"/>
+          </a:fillRef>
+          <a:effectRef idx="2">
+            <a:schemeClr val="accent1"/>
+          </a:effectRef>
+          <a:fontRef idx="minor">
+            <a:schemeClr val="lt1"/>
+          </a:fontRef>
+        </p:style>
+        <p:txBody>
+          <a:bodyPr rtlCol="0" anchor="ctr"/>
+          <a:lstStyle/>
+          <a:p>
+            <a:pPr algn="ctr"/>
+          </a:p>
+        </p:txBody>
+      </p:sp>
+      <p:sp>
+        <p:nvSpPr>
+          <p:cNvPr id="6" name="TextBox 5"/>
+          <p:cNvSpPr txBox="1"/>
+          <p:nvPr/>
+        </p:nvSpPr>
+        <p:spPr>
+          <a:xfrm>
+            <a:off x="859536" y="4169663"/>
+            <a:ext cx="10479024" cy="1051560"/>
+          </a:xfrm>
+          <a:prstGeom prst="rect">
+            <a:avLst/>
+          </a:prstGeom>
+          <a:noFill/>
+        </p:spPr>
+        <p:txBody>
+          <a:bodyPr wrap="square">
+            <a:spAutoFit/>
+          </a:bodyPr>
+          <a:lstStyle/>
+          <a:p>
+            <a:pPr>
+              <a:spcAft>
+                <a:spcPts val="700"/>
+              </a:spcAft>
+            </a:pPr>
+            <a:r>
+              <a:rPr sz="2300" b="1" i="0">
+                <a:solidFill>
+                  <a:srgbClr val="006E96"/>
+                </a:solidFill>
+                <a:latin typeface="Arial"/>
+              </a:rPr>
+              <a:t>Your training cost is a fraction of building the knowledge yourself.</a:t>
+            </a:r>
+          </a:p>
+        </p:txBody>
+      </p:sp>
+      <p:sp>
+        <p:nvSpPr>
+          <p:cNvPr id="7" name="TextBox 6"/>
+          <p:cNvSpPr txBox="1"/>
+          <p:nvPr/>
+        </p:nvSpPr>
+        <p:spPr>
+          <a:xfrm>
+            <a:off x="457200" y="6473952"/>
+            <a:ext cx="7772400" cy="292608"/>
+          </a:xfrm>
+          <a:prstGeom prst="rect">
+            <a:avLst/>
+          </a:prstGeom>
+          <a:noFill/>
+        </p:spPr>
+        <p:txBody>
+          <a:bodyPr wrap="square">
+            <a:spAutoFit/>
+          </a:bodyPr>
+          <a:lstStyle/>
+          <a:p>
+            <a:r>
+              <a:rPr sz="900" b="0" i="0">
+                <a:solidFill>
+                  <a:srgbClr val="595959"/>
+                </a:solidFill>
+                <a:latin typeface="Arial"/>
+              </a:rPr>
+              <a:t>5.5 · Build your team's capability with open knowledge products</a:t>
+            </a:r>
+          </a:p>
+        </p:txBody>
+      </p:sp>
+    </p:spTree>
+  </p:cSld>
+  <p:clrMapOvr>
+    <a:masterClrMapping/>
+  </p:clrMapOvr>
+</p:sld>
+</file>
+
+<file path=ppt/slides/slide37.xml><?xml version="1.0" encoding="utf-8"?>
+<p:sld xmlns:a="http://schemas.openxmlformats.org/drawingml/2006/main" xmlns:p="http://schemas.openxmlformats.org/presentationml/2006/main" xmlns:r="http://schemas.openxmlformats.org/officeDocument/2006/relationships">
+  <p:cSld>
+    <p:spTree>
+      <p:nvGrpSpPr>
+        <p:cNvPr id="1" name=""/>
+        <p:cNvGrpSpPr/>
+        <p:nvPr/>
+      </p:nvGrpSpPr>
+      <p:grpSpPr/>
+      <p:sp>
+        <p:nvSpPr>
+          <p:cNvPr id="2" name="Rectangle 1"/>
+          <p:cNvSpPr/>
+          <p:nvPr/>
+        </p:nvSpPr>
+        <p:spPr>
+          <a:xfrm>
+            <a:off x="457200" y="384048"/>
+            <a:ext cx="45720" cy="256032"/>
+          </a:xfrm>
+          <a:prstGeom prst="rect">
+            <a:avLst/>
+          </a:prstGeom>
+          <a:solidFill>
+            <a:srgbClr val="009CD6"/>
+          </a:solidFill>
+          <a:ln>
+            <a:noFill/>
+          </a:ln>
+          <a:effectLst/>
+        </p:spPr>
+        <p:style>
+          <a:lnRef idx="1">
+            <a:schemeClr val="accent1"/>
+          </a:lnRef>
+          <a:fillRef idx="3">
+            <a:schemeClr val="accent1"/>
+          </a:fillRef>
+          <a:effectRef idx="2">
+            <a:schemeClr val="accent1"/>
+          </a:effectRef>
+          <a:fontRef idx="minor">
+            <a:schemeClr val="lt1"/>
+          </a:fontRef>
+        </p:style>
+        <p:txBody>
+          <a:bodyPr rtlCol="0" anchor="ctr"/>
+          <a:lstStyle/>
+          <a:p>
+            <a:pPr algn="ctr"/>
+          </a:p>
+        </p:txBody>
+      </p:sp>
+      <p:sp>
+        <p:nvSpPr>
+          <p:cNvPr id="3" name="TextBox 2"/>
+          <p:cNvSpPr txBox="1"/>
+          <p:nvPr/>
+        </p:nvSpPr>
+        <p:spPr>
+          <a:xfrm>
+            <a:off x="621792" y="274320"/>
+            <a:ext cx="11247120" cy="914400"/>
+          </a:xfrm>
+          <a:prstGeom prst="rect">
+            <a:avLst/>
+          </a:prstGeom>
+          <a:noFill/>
+        </p:spPr>
+        <p:txBody>
+          <a:bodyPr wrap="square">
+            <a:spAutoFit/>
+          </a:bodyPr>
+          <a:lstStyle/>
+          <a:p>
+            <a:r>
+              <a:rPr sz="2800" b="1" i="0">
+                <a:solidFill>
+                  <a:srgbClr val="1A1A1A"/>
+                </a:solidFill>
+                <a:latin typeface="Arial"/>
+              </a:rPr>
+              <a:t>Three layers you draw on rather than build</a:t>
+            </a:r>
+          </a:p>
+        </p:txBody>
+      </p:sp>
+      <p:sp>
+        <p:nvSpPr>
+          <p:cNvPr id="4" name="Oval 3"/>
+          <p:cNvSpPr/>
+          <p:nvPr/>
+        </p:nvSpPr>
+        <p:spPr>
+          <a:xfrm>
+            <a:off x="621792" y="1508760"/>
+            <a:ext cx="310896" cy="310896"/>
+          </a:xfrm>
+          <a:prstGeom prst="ellipse">
+            <a:avLst/>
+          </a:prstGeom>
+          <a:solidFill>
+            <a:srgbClr val="009CD6"/>
+          </a:solidFill>
+          <a:ln>
+            <a:noFill/>
+          </a:ln>
+          <a:effectLst/>
+        </p:spPr>
+        <p:style>
+          <a:lnRef idx="1">
+            <a:schemeClr val="accent1"/>
+          </a:lnRef>
+          <a:fillRef idx="3">
+            <a:schemeClr val="accent1"/>
+          </a:fillRef>
+          <a:effectRef idx="2">
+            <a:schemeClr val="accent1"/>
+          </a:effectRef>
+          <a:fontRef idx="minor">
+            <a:schemeClr val="lt1"/>
+          </a:fontRef>
+        </p:style>
+        <p:txBody>
+          <a:bodyPr rtlCol="0" anchor="ctr" lIns="0" rIns="0" tIns="0" bIns="0" wrap="square"/>
+          <a:lstStyle/>
+          <a:p>
+            <a:pPr algn="ctr"/>
+            <a:r>
+              <a:rPr sz="1300" b="1" i="0">
+                <a:solidFill>
+                  <a:srgbClr val="FFFFFF"/>
+                </a:solidFill>
+                <a:latin typeface="Arial"/>
+              </a:rPr>
+              <a:t>1</a:t>
+            </a:r>
+          </a:p>
+        </p:txBody>
+      </p:sp>
+      <p:sp>
+        <p:nvSpPr>
+          <p:cNvPr id="5" name="TextBox 4"/>
+          <p:cNvSpPr txBox="1"/>
+          <p:nvPr/>
+        </p:nvSpPr>
+        <p:spPr>
+          <a:xfrm>
+            <a:off x="1115568" y="1463040"/>
+            <a:ext cx="10527487" cy="1386839"/>
+          </a:xfrm>
+          <a:prstGeom prst="rect">
+            <a:avLst/>
+          </a:prstGeom>
+          <a:noFill/>
+        </p:spPr>
+        <p:txBody>
+          <a:bodyPr wrap="square">
+            <a:spAutoFit/>
+          </a:bodyPr>
+          <a:lstStyle/>
+          <a:p>
+            <a:pPr>
+              <a:spcAft>
+                <a:spcPts val="300"/>
+              </a:spcAft>
+            </a:pPr>
+            <a:r>
+              <a:rPr sz="1900" b="1" i="0">
+                <a:solidFill>
+                  <a:srgbClr val="1A1A1A"/>
+                </a:solidFill>
+                <a:latin typeface="Arial"/>
+              </a:rPr>
+              <a:t>The published framework</a:t>
+            </a:r>
+          </a:p>
+          <a:p>
+            <a:pPr>
+              <a:spcAft>
+                <a:spcPts val="300"/>
+              </a:spcAft>
+            </a:pPr>
+            <a:r>
+              <a:rPr sz="1550" b="0" i="0">
+                <a:solidFill>
+                  <a:srgbClr val="595959"/>
+                </a:solidFill>
+                <a:latin typeface="Arial"/>
+              </a:rPr>
+              <a:t>What to do — the phases, the principles, the deliverables.</a:t>
+            </a:r>
+          </a:p>
+        </p:txBody>
+      </p:sp>
+      <p:sp>
+        <p:nvSpPr>
+          <p:cNvPr id="6" name="Rectangle 5"/>
+          <p:cNvSpPr/>
+          <p:nvPr/>
+        </p:nvSpPr>
+        <p:spPr>
+          <a:xfrm>
+            <a:off x="621792" y="2854452"/>
+            <a:ext cx="10881360" cy="12700"/>
+          </a:xfrm>
+          <a:prstGeom prst="rect">
+            <a:avLst/>
+          </a:prstGeom>
+          <a:solidFill>
+            <a:srgbClr val="DDECF4"/>
+          </a:solidFill>
+          <a:ln>
+            <a:noFill/>
+          </a:ln>
+          <a:effectLst/>
+        </p:spPr>
+        <p:style>
+          <a:lnRef idx="1">
+            <a:schemeClr val="accent1"/>
+          </a:lnRef>
+          <a:fillRef idx="3">
+            <a:schemeClr val="accent1"/>
+          </a:fillRef>
+          <a:effectRef idx="2">
+            <a:schemeClr val="accent1"/>
+          </a:effectRef>
+          <a:fontRef idx="minor">
+            <a:schemeClr val="lt1"/>
+          </a:fontRef>
+        </p:style>
+        <p:txBody>
+          <a:bodyPr rtlCol="0" anchor="ctr"/>
+          <a:lstStyle/>
+          <a:p>
+            <a:pPr algn="ctr"/>
+          </a:p>
+        </p:txBody>
+      </p:sp>
+      <p:sp>
+        <p:nvSpPr>
+          <p:cNvPr id="7" name="Oval 6"/>
+          <p:cNvSpPr/>
+          <p:nvPr/>
+        </p:nvSpPr>
+        <p:spPr>
+          <a:xfrm>
+            <a:off x="621792" y="2941319"/>
+            <a:ext cx="310896" cy="310896"/>
+          </a:xfrm>
+          <a:prstGeom prst="ellipse">
+            <a:avLst/>
+          </a:prstGeom>
+          <a:solidFill>
+            <a:srgbClr val="009CD6"/>
+          </a:solidFill>
+          <a:ln>
+            <a:noFill/>
+          </a:ln>
+          <a:effectLst/>
+        </p:spPr>
+        <p:style>
+          <a:lnRef idx="1">
+            <a:schemeClr val="accent1"/>
+          </a:lnRef>
+          <a:fillRef idx="3">
+            <a:schemeClr val="accent1"/>
+          </a:fillRef>
+          <a:effectRef idx="2">
+            <a:schemeClr val="accent1"/>
+          </a:effectRef>
+          <a:fontRef idx="minor">
+            <a:schemeClr val="lt1"/>
+          </a:fontRef>
+        </p:style>
+        <p:txBody>
+          <a:bodyPr rtlCol="0" anchor="ctr" lIns="0" rIns="0" tIns="0" bIns="0" wrap="square"/>
+          <a:lstStyle/>
+          <a:p>
+            <a:pPr algn="ctr"/>
+            <a:r>
+              <a:rPr sz="1300" b="1" i="0">
+                <a:solidFill>
+                  <a:srgbClr val="FFFFFF"/>
+                </a:solidFill>
+                <a:latin typeface="Arial"/>
+              </a:rPr>
+              <a:t>2</a:t>
+            </a:r>
+          </a:p>
+        </p:txBody>
+      </p:sp>
+      <p:sp>
+        <p:nvSpPr>
+          <p:cNvPr id="8" name="TextBox 7"/>
+          <p:cNvSpPr txBox="1"/>
+          <p:nvPr/>
+        </p:nvSpPr>
+        <p:spPr>
+          <a:xfrm>
+            <a:off x="1115568" y="2895600"/>
+            <a:ext cx="10527487" cy="1386839"/>
+          </a:xfrm>
+          <a:prstGeom prst="rect">
+            <a:avLst/>
+          </a:prstGeom>
+          <a:noFill/>
+        </p:spPr>
+        <p:txBody>
+          <a:bodyPr wrap="square">
+            <a:spAutoFit/>
+          </a:bodyPr>
+          <a:lstStyle/>
+          <a:p>
+            <a:pPr>
+              <a:spcAft>
+                <a:spcPts val="300"/>
+              </a:spcAft>
+            </a:pPr>
+            <a:r>
+              <a:rPr sz="1900" b="1" i="0">
+                <a:solidFill>
+                  <a:srgbClr val="1A1A1A"/>
+                </a:solidFill>
+                <a:latin typeface="Arial"/>
+              </a:rPr>
+              <a:t>The worked examples and the AI plays</a:t>
+            </a:r>
+          </a:p>
+          <a:p>
+            <a:pPr>
+              <a:spcAft>
+                <a:spcPts val="300"/>
+              </a:spcAft>
+            </a:pPr>
+            <a:r>
+              <a:rPr sz="1550" b="0" i="0">
+                <a:solidFill>
+                  <a:srgbClr val="595959"/>
+                </a:solidFill>
+                <a:latin typeface="Arial"/>
+              </a:rPr>
+              <a:t>How to do it faster — a method turned into a draft in minutes.</a:t>
+            </a:r>
+          </a:p>
+        </p:txBody>
+      </p:sp>
+      <p:sp>
+        <p:nvSpPr>
+          <p:cNvPr id="9" name="Rectangle 8"/>
+          <p:cNvSpPr/>
+          <p:nvPr/>
+        </p:nvSpPr>
+        <p:spPr>
+          <a:xfrm>
+            <a:off x="621792" y="4287011"/>
+            <a:ext cx="10881360" cy="12700"/>
+          </a:xfrm>
+          <a:prstGeom prst="rect">
+            <a:avLst/>
+          </a:prstGeom>
+          <a:solidFill>
+            <a:srgbClr val="DDECF4"/>
+          </a:solidFill>
+          <a:ln>
+            <a:noFill/>
+          </a:ln>
+          <a:effectLst/>
+        </p:spPr>
+        <p:style>
+          <a:lnRef idx="1">
+            <a:schemeClr val="accent1"/>
+          </a:lnRef>
+          <a:fillRef idx="3">
+            <a:schemeClr val="accent1"/>
+          </a:fillRef>
+          <a:effectRef idx="2">
+            <a:schemeClr val="accent1"/>
+          </a:effectRef>
+          <a:fontRef idx="minor">
+            <a:schemeClr val="lt1"/>
+          </a:fontRef>
+        </p:style>
+        <p:txBody>
+          <a:bodyPr rtlCol="0" anchor="ctr"/>
+          <a:lstStyle/>
+          <a:p>
+            <a:pPr algn="ctr"/>
+          </a:p>
+        </p:txBody>
+      </p:sp>
+      <p:sp>
+        <p:nvSpPr>
+          <p:cNvPr id="10" name="Oval 9"/>
+          <p:cNvSpPr/>
+          <p:nvPr/>
+        </p:nvSpPr>
+        <p:spPr>
+          <a:xfrm>
+            <a:off x="621792" y="4373879"/>
+            <a:ext cx="310896" cy="310896"/>
+          </a:xfrm>
+          <a:prstGeom prst="ellipse">
+            <a:avLst/>
+          </a:prstGeom>
+          <a:solidFill>
+            <a:srgbClr val="009CD6"/>
+          </a:solidFill>
+          <a:ln>
+            <a:noFill/>
+          </a:ln>
+          <a:effectLst/>
+        </p:spPr>
+        <p:style>
+          <a:lnRef idx="1">
+            <a:schemeClr val="accent1"/>
+          </a:lnRef>
+          <a:fillRef idx="3">
+            <a:schemeClr val="accent1"/>
+          </a:fillRef>
+          <a:effectRef idx="2">
+            <a:schemeClr val="accent1"/>
+          </a:effectRef>
+          <a:fontRef idx="minor">
+            <a:schemeClr val="lt1"/>
+          </a:fontRef>
+        </p:style>
+        <p:txBody>
+          <a:bodyPr rtlCol="0" anchor="ctr" lIns="0" rIns="0" tIns="0" bIns="0" wrap="square"/>
+          <a:lstStyle/>
+          <a:p>
+            <a:pPr algn="ctr"/>
+            <a:r>
+              <a:rPr sz="1300" b="1" i="0">
+                <a:solidFill>
+                  <a:srgbClr val="FFFFFF"/>
+                </a:solidFill>
+                <a:latin typeface="Arial"/>
+              </a:rPr>
+              <a:t>3</a:t>
+            </a:r>
+          </a:p>
+        </p:txBody>
+      </p:sp>
+      <p:sp>
+        <p:nvSpPr>
+          <p:cNvPr id="11" name="TextBox 10"/>
+          <p:cNvSpPr txBox="1"/>
+          <p:nvPr/>
+        </p:nvSpPr>
+        <p:spPr>
+          <a:xfrm>
+            <a:off x="1115568" y="4328159"/>
+            <a:ext cx="10527487" cy="1386839"/>
+          </a:xfrm>
+          <a:prstGeom prst="rect">
+            <a:avLst/>
+          </a:prstGeom>
+          <a:noFill/>
+        </p:spPr>
+        <p:txBody>
+          <a:bodyPr wrap="square">
+            <a:spAutoFit/>
+          </a:bodyPr>
+          <a:lstStyle/>
+          <a:p>
+            <a:pPr>
+              <a:spcAft>
+                <a:spcPts val="300"/>
+              </a:spcAft>
+            </a:pPr>
+            <a:r>
+              <a:rPr sz="1900" b="1" i="0">
+                <a:solidFill>
+                  <a:srgbClr val="1A1A1A"/>
+                </a:solidFill>
+                <a:latin typeface="Arial"/>
+              </a:rPr>
+              <a:t>The community of countries and partners</a:t>
+            </a:r>
+          </a:p>
+          <a:p>
+            <a:pPr>
+              <a:spcAft>
+                <a:spcPts val="300"/>
+              </a:spcAft>
+            </a:pPr>
+            <a:r>
+              <a:rPr sz="1550" b="0" i="0">
+                <a:solidFill>
+                  <a:srgbClr val="595959"/>
+                </a:solidFill>
+                <a:latin typeface="Arial"/>
+              </a:rPr>
+              <a:t>Who to ask when your team is stuck.</a:t>
+            </a:r>
+          </a:p>
+        </p:txBody>
+      </p:sp>
+      <p:sp>
+        <p:nvSpPr>
+          <p:cNvPr id="12" name="TextBox 11"/>
+          <p:cNvSpPr txBox="1"/>
+          <p:nvPr/>
+        </p:nvSpPr>
+        <p:spPr>
+          <a:xfrm>
+            <a:off x="658368" y="5870448"/>
+            <a:ext cx="10881360" cy="548640"/>
+          </a:xfrm>
+          <a:prstGeom prst="rect">
+            <a:avLst/>
+          </a:prstGeom>
+          <a:noFill/>
+        </p:spPr>
+        <p:txBody>
+          <a:bodyPr wrap="square">
+            <a:spAutoFit/>
+          </a:bodyPr>
+          <a:lstStyle/>
+          <a:p>
+            <a:r>
+              <a:rPr sz="1550" b="1" i="0">
+                <a:solidFill>
+                  <a:srgbClr val="006E96"/>
+                </a:solidFill>
+                <a:latin typeface="Arial"/>
+              </a:rPr>
+              <a:t>You are not equipping your team alone. You are connecting them to a network.</a:t>
+            </a:r>
+          </a:p>
+        </p:txBody>
+      </p:sp>
+      <p:sp>
+        <p:nvSpPr>
+          <p:cNvPr id="13" name="TextBox 12"/>
+          <p:cNvSpPr txBox="1"/>
+          <p:nvPr/>
+        </p:nvSpPr>
+        <p:spPr>
+          <a:xfrm>
+            <a:off x="457200" y="6473952"/>
+            <a:ext cx="7772400" cy="292608"/>
+          </a:xfrm>
+          <a:prstGeom prst="rect">
+            <a:avLst/>
+          </a:prstGeom>
+          <a:noFill/>
+        </p:spPr>
+        <p:txBody>
+          <a:bodyPr wrap="square">
+            <a:spAutoFit/>
+          </a:bodyPr>
+          <a:lstStyle/>
+          <a:p>
+            <a:r>
+              <a:rPr sz="900" b="0" i="0">
+                <a:solidFill>
+                  <a:srgbClr val="595959"/>
+                </a:solidFill>
+                <a:latin typeface="Arial"/>
+              </a:rPr>
+              <a:t>5.5 · Build your team's capability with open knowledge products</a:t>
+            </a:r>
+          </a:p>
+        </p:txBody>
+      </p:sp>
+    </p:spTree>
+  </p:cSld>
+  <p:clrMapOvr>
+    <a:masterClrMapping/>
+  </p:clrMapOvr>
+</p:sld>
+</file>
+
+<file path=ppt/slides/slide38.xml><?xml version="1.0" encoding="utf-8"?>
+<p:sld xmlns:a="http://schemas.openxmlformats.org/drawingml/2006/main" xmlns:p="http://schemas.openxmlformats.org/presentationml/2006/main" xmlns:r="http://schemas.openxmlformats.org/officeDocument/2006/relationships">
+  <p:cSld>
+    <p:spTree>
+      <p:nvGrpSpPr>
+        <p:cNvPr id="1" name=""/>
+        <p:cNvGrpSpPr/>
+        <p:nvPr/>
+      </p:nvGrpSpPr>
+      <p:grpSpPr/>
+      <p:sp>
+        <p:nvSpPr>
+          <p:cNvPr id="2" name="Rectangle 1"/>
+          <p:cNvSpPr/>
+          <p:nvPr/>
+        </p:nvSpPr>
+        <p:spPr>
+          <a:xfrm>
+            <a:off x="457200" y="384048"/>
+            <a:ext cx="45720" cy="256032"/>
+          </a:xfrm>
+          <a:prstGeom prst="rect">
+            <a:avLst/>
+          </a:prstGeom>
+          <a:solidFill>
+            <a:srgbClr val="009CD6"/>
+          </a:solidFill>
+          <a:ln>
+            <a:noFill/>
+          </a:ln>
+          <a:effectLst/>
+        </p:spPr>
+        <p:style>
+          <a:lnRef idx="1">
+            <a:schemeClr val="accent1"/>
+          </a:lnRef>
+          <a:fillRef idx="3">
+            <a:schemeClr val="accent1"/>
+          </a:fillRef>
+          <a:effectRef idx="2">
+            <a:schemeClr val="accent1"/>
+          </a:effectRef>
+          <a:fontRef idx="minor">
+            <a:schemeClr val="lt1"/>
+          </a:fontRef>
+        </p:style>
+        <p:txBody>
+          <a:bodyPr rtlCol="0" anchor="ctr"/>
+          <a:lstStyle/>
+          <a:p>
+            <a:pPr algn="ctr"/>
+          </a:p>
+        </p:txBody>
+      </p:sp>
+      <p:sp>
+        <p:nvSpPr>
+          <p:cNvPr id="3" name="TextBox 2"/>
+          <p:cNvSpPr txBox="1"/>
+          <p:nvPr/>
+        </p:nvSpPr>
+        <p:spPr>
+          <a:xfrm>
+            <a:off x="621792" y="274320"/>
+            <a:ext cx="11247120" cy="914400"/>
+          </a:xfrm>
+          <a:prstGeom prst="rect">
+            <a:avLst/>
+          </a:prstGeom>
+          <a:noFill/>
+        </p:spPr>
+        <p:txBody>
+          <a:bodyPr wrap="square">
+            <a:spAutoFit/>
+          </a:bodyPr>
+          <a:lstStyle/>
+          <a:p>
+            <a:r>
+              <a:rPr sz="2800" b="1" i="0">
+                <a:solidFill>
+                  <a:srgbClr val="1A1A1A"/>
+                </a:solidFill>
+                <a:latin typeface="Arial"/>
+              </a:rPr>
+              <a:t>What you actually need to fund is time, not invention</a:t>
+            </a:r>
+          </a:p>
+        </p:txBody>
+      </p:sp>
+      <p:sp>
+        <p:nvSpPr>
+          <p:cNvPr id="4" name="TextBox 3"/>
+          <p:cNvSpPr txBox="1"/>
+          <p:nvPr/>
+        </p:nvSpPr>
+        <p:spPr>
+          <a:xfrm>
+            <a:off x="658368" y="1600200"/>
+            <a:ext cx="10881360" cy="2194560"/>
+          </a:xfrm>
+          <a:prstGeom prst="rect">
+            <a:avLst/>
+          </a:prstGeom>
+          <a:noFill/>
+        </p:spPr>
+        <p:txBody>
+          <a:bodyPr wrap="square">
+            <a:spAutoFit/>
+          </a:bodyPr>
+          <a:lstStyle/>
+          <a:p>
+            <a:pPr>
+              <a:spcAft>
+                <a:spcPts val="1200"/>
+              </a:spcAft>
+            </a:pPr>
+            <a:r>
+              <a:rPr sz="2000" b="0" i="0">
+                <a:solidFill>
+                  <a:srgbClr val="1A1A1A"/>
+                </a:solidFill>
+                <a:latin typeface="Arial"/>
+              </a:rPr>
+              <a:t>Not the invention of a method — that exists. You fund a small team given the time to learn it and apply it to your country, and access to the materials and the community.</a:t>
+            </a:r>
+          </a:p>
+          <a:p>
+            <a:pPr>
+              <a:spcAft>
+                <a:spcPts val="1200"/>
+              </a:spcAft>
+            </a:pPr>
+            <a:r>
+              <a:rPr sz="2000" b="0" i="0">
+                <a:solidFill>
+                  <a:srgbClr val="1A1A1A"/>
+                </a:solidFill>
+                <a:latin typeface="Arial"/>
+              </a:rPr>
+              <a:t>The expensive thing — decades of accumulated knowledge about what works in public-sector architecture — you get for the cost of learning it, not the cost of discovering it.</a:t>
+            </a:r>
+          </a:p>
+        </p:txBody>
+      </p:sp>
+      <p:sp>
+        <p:nvSpPr>
+          <p:cNvPr id="5" name="Rounded Rectangle 4"/>
+          <p:cNvSpPr/>
+          <p:nvPr/>
+        </p:nvSpPr>
+        <p:spPr>
+          <a:xfrm>
+            <a:off x="658368" y="3977639"/>
+            <a:ext cx="10881360" cy="1325880"/>
+          </a:xfrm>
+          <a:prstGeom prst="roundRect">
+            <a:avLst>
+              <a:gd name="adj" fmla="val 4500"/>
+            </a:avLst>
+          </a:prstGeom>
+          <a:solidFill>
+            <a:srgbClr val="E5F5FB"/>
+          </a:solidFill>
+          <a:ln>
+            <a:noFill/>
+          </a:ln>
+          <a:effectLst/>
+        </p:spPr>
+        <p:style>
+          <a:lnRef idx="1">
+            <a:schemeClr val="accent1"/>
+          </a:lnRef>
+          <a:fillRef idx="3">
+            <a:schemeClr val="accent1"/>
+          </a:fillRef>
+          <a:effectRef idx="2">
+            <a:schemeClr val="accent1"/>
+          </a:effectRef>
+          <a:fontRef idx="minor">
+            <a:schemeClr val="lt1"/>
+          </a:fontRef>
+        </p:style>
+        <p:txBody>
+          <a:bodyPr rtlCol="0" anchor="ctr"/>
+          <a:lstStyle/>
+          <a:p>
+            <a:pPr algn="ctr"/>
+          </a:p>
+        </p:txBody>
+      </p:sp>
+      <p:sp>
+        <p:nvSpPr>
+          <p:cNvPr id="6" name="TextBox 5"/>
+          <p:cNvSpPr txBox="1"/>
+          <p:nvPr/>
+        </p:nvSpPr>
+        <p:spPr>
+          <a:xfrm>
+            <a:off x="859536" y="4169663"/>
+            <a:ext cx="10479024" cy="1051560"/>
+          </a:xfrm>
+          <a:prstGeom prst="rect">
+            <a:avLst/>
+          </a:prstGeom>
+          <a:noFill/>
+        </p:spPr>
+        <p:txBody>
+          <a:bodyPr wrap="square">
+            <a:spAutoFit/>
+          </a:bodyPr>
+          <a:lstStyle/>
+          <a:p>
+            <a:pPr>
+              <a:spcAft>
+                <a:spcPts val="700"/>
+              </a:spcAft>
+            </a:pPr>
+            <a:r>
+              <a:rPr sz="2300" b="1" i="0">
+                <a:solidFill>
+                  <a:srgbClr val="006E96"/>
+                </a:solidFill>
+                <a:latin typeface="Arial"/>
+              </a:rPr>
+              <a:t>Fund a team to apply a proven method, not consultants to invent one.</a:t>
+            </a:r>
+          </a:p>
+        </p:txBody>
+      </p:sp>
+      <p:sp>
+        <p:nvSpPr>
+          <p:cNvPr id="7" name="TextBox 6"/>
+          <p:cNvSpPr txBox="1"/>
+          <p:nvPr/>
+        </p:nvSpPr>
+        <p:spPr>
+          <a:xfrm>
+            <a:off x="457200" y="6473952"/>
+            <a:ext cx="7772400" cy="292608"/>
+          </a:xfrm>
+          <a:prstGeom prst="rect">
+            <a:avLst/>
+          </a:prstGeom>
+          <a:noFill/>
+        </p:spPr>
+        <p:txBody>
+          <a:bodyPr wrap="square">
+            <a:spAutoFit/>
+          </a:bodyPr>
+          <a:lstStyle/>
+          <a:p>
+            <a:r>
+              <a:rPr sz="900" b="0" i="0">
+                <a:solidFill>
+                  <a:srgbClr val="595959"/>
+                </a:solidFill>
+                <a:latin typeface="Arial"/>
+              </a:rPr>
+              <a:t>5.5 · Build your team's capability with open knowledge products</a:t>
+            </a:r>
+          </a:p>
+        </p:txBody>
+      </p:sp>
+    </p:spTree>
+  </p:cSld>
+  <p:clrMapOvr>
+    <a:masterClrMapping/>
+  </p:clrMapOvr>
+</p:sld>
+</file>
+
+<file path=ppt/slides/slide39.xml><?xml version="1.0" encoding="utf-8"?>
+<p:sld xmlns:a="http://schemas.openxmlformats.org/drawingml/2006/main" xmlns:p="http://schemas.openxmlformats.org/presentationml/2006/main" xmlns:r="http://schemas.openxmlformats.org/officeDocument/2006/relationships">
+  <p:cSld>
+    <p:spTree>
+      <p:nvGrpSpPr>
+        <p:cNvPr id="1" name=""/>
+        <p:cNvGrpSpPr/>
+        <p:nvPr/>
+      </p:nvGrpSpPr>
+      <p:grpSpPr/>
+      <p:sp>
+        <p:nvSpPr>
+          <p:cNvPr id="2" name="Rectangle 1"/>
+          <p:cNvSpPr/>
+          <p:nvPr/>
+        </p:nvSpPr>
+        <p:spPr>
+          <a:xfrm>
+            <a:off x="457200" y="384048"/>
+            <a:ext cx="45720" cy="256032"/>
+          </a:xfrm>
+          <a:prstGeom prst="rect">
+            <a:avLst/>
+          </a:prstGeom>
+          <a:solidFill>
+            <a:srgbClr val="009CD6"/>
+          </a:solidFill>
+          <a:ln>
+            <a:noFill/>
+          </a:ln>
+          <a:effectLst/>
+        </p:spPr>
+        <p:style>
+          <a:lnRef idx="1">
+            <a:schemeClr val="accent1"/>
+          </a:lnRef>
+          <a:fillRef idx="3">
+            <a:schemeClr val="accent1"/>
+          </a:fillRef>
+          <a:effectRef idx="2">
+            <a:schemeClr val="accent1"/>
+          </a:effectRef>
+          <a:fontRef idx="minor">
+            <a:schemeClr val="lt1"/>
+          </a:fontRef>
+        </p:style>
+        <p:txBody>
+          <a:bodyPr rtlCol="0" anchor="ctr"/>
+          <a:lstStyle/>
+          <a:p>
+            <a:pPr algn="ctr"/>
+          </a:p>
+        </p:txBody>
+      </p:sp>
+      <p:sp>
+        <p:nvSpPr>
+          <p:cNvPr id="3" name="TextBox 2"/>
+          <p:cNvSpPr txBox="1"/>
+          <p:nvPr/>
+        </p:nvSpPr>
+        <p:spPr>
+          <a:xfrm>
+            <a:off x="621792" y="274320"/>
+            <a:ext cx="11247120" cy="914400"/>
+          </a:xfrm>
+          <a:prstGeom prst="rect">
+            <a:avLst/>
+          </a:prstGeom>
+          <a:noFill/>
+        </p:spPr>
+        <p:txBody>
+          <a:bodyPr wrap="square">
+            <a:spAutoFit/>
+          </a:bodyPr>
+          <a:lstStyle/>
+          <a:p>
+            <a:r>
+              <a:rPr sz="2800" b="1" i="0">
+                <a:solidFill>
+                  <a:srgbClr val="1A1A1A"/>
+                </a:solidFill>
+                <a:latin typeface="Arial"/>
+              </a:rPr>
+              <a:t>Build the capability in your own people</a:t>
+            </a:r>
+          </a:p>
+        </p:txBody>
+      </p:sp>
+      <p:sp>
+        <p:nvSpPr>
+          <p:cNvPr id="4" name="TextBox 3"/>
+          <p:cNvSpPr txBox="1"/>
+          <p:nvPr/>
+        </p:nvSpPr>
+        <p:spPr>
+          <a:xfrm>
+            <a:off x="658368" y="1600200"/>
+            <a:ext cx="10881360" cy="2194560"/>
+          </a:xfrm>
+          <a:prstGeom prst="rect">
+            <a:avLst/>
+          </a:prstGeom>
+          <a:noFill/>
+        </p:spPr>
+        <p:txBody>
+          <a:bodyPr wrap="square">
+            <a:spAutoFit/>
+          </a:bodyPr>
+          <a:lstStyle/>
+          <a:p>
+            <a:pPr>
+              <a:spcAft>
+                <a:spcPts val="1200"/>
+              </a:spcAft>
+            </a:pPr>
+            <a:r>
+              <a:rPr sz="2000" b="0" i="0">
+                <a:solidFill>
+                  <a:srgbClr val="1A1A1A"/>
+                </a:solidFill>
+                <a:latin typeface="Arial"/>
+              </a:rPr>
+              <a:t>Open knowledge products let you build the capability inside your own institutions — architects who learn the method, apply it, and stay — instead of expertise that walks out of the door when a contract ends.</a:t>
+            </a:r>
+          </a:p>
+          <a:p>
+            <a:pPr>
+              <a:spcAft>
+                <a:spcPts val="1200"/>
+              </a:spcAft>
+            </a:pPr>
+            <a:r>
+              <a:rPr sz="2000" b="0" i="0">
+                <a:solidFill>
+                  <a:srgbClr val="1A1A1A"/>
+                </a:solidFill>
+                <a:latin typeface="Arial"/>
+              </a:rPr>
+              <a:t>A strategist's quiet goal in all of this is a national capability that outlasts any single contract or consultant.</a:t>
+            </a:r>
+          </a:p>
+        </p:txBody>
+      </p:sp>
+      <p:sp>
+        <p:nvSpPr>
+          <p:cNvPr id="5" name="Rounded Rectangle 4"/>
+          <p:cNvSpPr/>
+          <p:nvPr/>
+        </p:nvSpPr>
+        <p:spPr>
+          <a:xfrm>
+            <a:off x="658368" y="3977639"/>
+            <a:ext cx="10881360" cy="1325880"/>
+          </a:xfrm>
+          <a:prstGeom prst="roundRect">
+            <a:avLst>
+              <a:gd name="adj" fmla="val 4500"/>
+            </a:avLst>
+          </a:prstGeom>
+          <a:solidFill>
+            <a:srgbClr val="E5F5FB"/>
+          </a:solidFill>
+          <a:ln>
+            <a:noFill/>
+          </a:ln>
+          <a:effectLst/>
+        </p:spPr>
+        <p:style>
+          <a:lnRef idx="1">
+            <a:schemeClr val="accent1"/>
+          </a:lnRef>
+          <a:fillRef idx="3">
+            <a:schemeClr val="accent1"/>
+          </a:fillRef>
+          <a:effectRef idx="2">
+            <a:schemeClr val="accent1"/>
+          </a:effectRef>
+          <a:fontRef idx="minor">
+            <a:schemeClr val="lt1"/>
+          </a:fontRef>
+        </p:style>
+        <p:txBody>
+          <a:bodyPr rtlCol="0" anchor="ctr"/>
+          <a:lstStyle/>
+          <a:p>
+            <a:pPr algn="ctr"/>
+          </a:p>
+        </p:txBody>
+      </p:sp>
+      <p:sp>
+        <p:nvSpPr>
+          <p:cNvPr id="6" name="TextBox 5"/>
+          <p:cNvSpPr txBox="1"/>
+          <p:nvPr/>
+        </p:nvSpPr>
+        <p:spPr>
+          <a:xfrm>
+            <a:off x="859536" y="4169663"/>
+            <a:ext cx="10479024" cy="1051560"/>
+          </a:xfrm>
+          <a:prstGeom prst="rect">
+            <a:avLst/>
+          </a:prstGeom>
+          <a:noFill/>
+        </p:spPr>
+        <p:txBody>
+          <a:bodyPr wrap="square">
+            <a:spAutoFit/>
+          </a:bodyPr>
+          <a:lstStyle/>
+          <a:p>
+            <a:pPr>
+              <a:spcAft>
+                <a:spcPts val="700"/>
+              </a:spcAft>
+            </a:pPr>
+            <a:r>
+              <a:rPr sz="2300" b="1" i="0">
+                <a:solidFill>
+                  <a:srgbClr val="006E96"/>
+                </a:solidFill>
+                <a:latin typeface="Arial"/>
+              </a:rPr>
+              <a:t>Open knowledge products are how you build it in your own people.</a:t>
+            </a:r>
+          </a:p>
+        </p:txBody>
+      </p:sp>
+      <p:sp>
+        <p:nvSpPr>
+          <p:cNvPr id="7" name="TextBox 6"/>
+          <p:cNvSpPr txBox="1"/>
+          <p:nvPr/>
+        </p:nvSpPr>
+        <p:spPr>
+          <a:xfrm>
+            <a:off x="457200" y="6473952"/>
+            <a:ext cx="7772400" cy="292608"/>
+          </a:xfrm>
+          <a:prstGeom prst="rect">
+            <a:avLst/>
+          </a:prstGeom>
+          <a:noFill/>
+        </p:spPr>
+        <p:txBody>
+          <a:bodyPr wrap="square">
+            <a:spAutoFit/>
+          </a:bodyPr>
+          <a:lstStyle/>
+          <a:p>
+            <a:r>
+              <a:rPr sz="900" b="0" i="0">
+                <a:solidFill>
+                  <a:srgbClr val="595959"/>
+                </a:solidFill>
+                <a:latin typeface="Arial"/>
+              </a:rPr>
+              <a:t>5.5 · Build your team's capability with open knowledge products</a:t>
+            </a:r>
+          </a:p>
+        </p:txBody>
+      </p:sp>
+    </p:spTree>
+  </p:cSld>
+  <p:clrMapOvr>
+    <a:masterClrMapping/>
+  </p:clrMapOvr>
+</p:sld>
+</file>
+
+<file path=ppt/slides/slide40.xml><?xml version="1.0" encoding="utf-8"?>
+<p:sld xmlns:a="http://schemas.openxmlformats.org/drawingml/2006/main" xmlns:p="http://schemas.openxmlformats.org/presentationml/2006/main" xmlns:r="http://schemas.openxmlformats.org/officeDocument/2006/relationships">
+  <p:cSld>
+    <p:spTree>
+      <p:nvGrpSpPr>
+        <p:cNvPr id="1" name=""/>
+        <p:cNvGrpSpPr/>
+        <p:nvPr/>
+      </p:nvGrpSpPr>
+      <p:grpSpPr/>
+      <p:sp>
+        <p:nvSpPr>
+          <p:cNvPr id="2" name="TextBox 1"/>
+          <p:cNvSpPr txBox="1"/>
+          <p:nvPr/>
+        </p:nvSpPr>
+        <p:spPr>
+          <a:xfrm>
             <a:off x="1005840" y="2103120"/>
             <a:ext cx="10149840" cy="2377440"/>
           </a:xfrm>
@@ -14145,7 +13623,7 @@
 </p:sld>
 </file>
 
-<file path=ppt/slides/slide36.xml><?xml version="1.0" encoding="utf-8"?>
+<file path=ppt/slides/slide41.xml><?xml version="1.0" encoding="utf-8"?>
 <p:sld xmlns:a="http://schemas.openxmlformats.org/drawingml/2006/main" xmlns:p="http://schemas.openxmlformats.org/presentationml/2006/main" xmlns:r="http://schemas.openxmlformats.org/officeDocument/2006/relationships">
   <p:cSld>
     <p:spTree>

--- a/10-Knowledge-Products/KP1-GEA/videos/module_5/en/decks/KP1_M5_5.5_Deck_v0.2.pptx
+++ b/10-Knowledge-Products/KP1-GEA/videos/module_5/en/decks/KP1_M5_5.5_Deck_v0.2.pptx
@@ -11771,7 +11771,7 @@
                 </a:solidFill>
                 <a:latin typeface="Arial"/>
               </a:rPr>
-              <a:t>~4 minutes · standalone video · voice-over on text slides</a:t>
+              <a:t>standalone video · voice-over on text slides</a:t>
             </a:r>
           </a:p>
         </p:txBody>

--- a/10-Knowledge-Products/KP1-GEA/videos/module_5/en/decks/KP1_M5_5.5_Deck_v0.2.pptx
+++ b/10-Knowledge-Products/KP1-GEA/videos/module_5/en/decks/KP1_M5_5.5_Deck_v0.2.pptx
@@ -11635,7 +11635,7 @@
                 </a:solidFill>
                 <a:latin typeface="Arial"/>
               </a:rPr>
-              <a:t>KP1 · MODULE 5 · VIDEO 5.5</a:t>
+              <a:t>MODULE 5 · VIDEO 5.5</a:t>
             </a:r>
           </a:p>
         </p:txBody>
